--- a/Docs/Zone-Wise PQC and QKD for SMR Control Systems.pptx
+++ b/Docs/Zone-Wise PQC and QKD for SMR Control Systems.pptx
@@ -5,23 +5,26 @@
     <p:sldMasterId id="2147483648" r:id="rId1"/>
   </p:sldMasterIdLst>
   <p:notesMasterIdLst>
-    <p:notesMasterId r:id="rId17"/>
+    <p:notesMasterId r:id="rId19"/>
   </p:notesMasterIdLst>
+  <p:handoutMasterIdLst>
+    <p:handoutMasterId r:id="rId20"/>
+  </p:handoutMasterIdLst>
   <p:sldIdLst>
-    <p:sldId id="256" r:id="rId3"/>
-    <p:sldId id="257" r:id="rId4"/>
-    <p:sldId id="258" r:id="rId5"/>
-    <p:sldId id="259" r:id="rId6"/>
-    <p:sldId id="260" r:id="rId7"/>
-    <p:sldId id="261" r:id="rId8"/>
-    <p:sldId id="262" r:id="rId9"/>
-    <p:sldId id="263" r:id="rId10"/>
-    <p:sldId id="264" r:id="rId11"/>
-    <p:sldId id="265" r:id="rId12"/>
-    <p:sldId id="266" r:id="rId13"/>
-    <p:sldId id="267" r:id="rId14"/>
-    <p:sldId id="268" r:id="rId15"/>
-    <p:sldId id="269" r:id="rId16"/>
+    <p:sldId id="256" r:id="rId5"/>
+    <p:sldId id="257" r:id="rId6"/>
+    <p:sldId id="258" r:id="rId7"/>
+    <p:sldId id="259" r:id="rId8"/>
+    <p:sldId id="260" r:id="rId9"/>
+    <p:sldId id="261" r:id="rId10"/>
+    <p:sldId id="262" r:id="rId11"/>
+    <p:sldId id="263" r:id="rId12"/>
+    <p:sldId id="264" r:id="rId13"/>
+    <p:sldId id="265" r:id="rId14"/>
+    <p:sldId id="266" r:id="rId15"/>
+    <p:sldId id="267" r:id="rId16"/>
+    <p:sldId id="268" r:id="rId17"/>
+    <p:sldId id="269" r:id="rId18"/>
   </p:sldIdLst>
   <p:sldSz cx="12192000" cy="6858000"/>
   <p:notesSz cx="6858000" cy="12192000"/>
@@ -120,6 +123,178 @@
 </p:presentation>
 </file>
 
+<file path=ppt/handoutMasters/handoutMaster1.xml><?xml version="1.0" encoding="utf-8"?>
+<p:handoutMaster xmlns:a="http://schemas.openxmlformats.org/drawingml/2006/main" xmlns:r="http://schemas.openxmlformats.org/officeDocument/2006/relationships" xmlns:p="http://schemas.openxmlformats.org/presentationml/2006/main">
+  <p:cSld name="">
+    <p:bg>
+      <p:bgRef idx="1001">
+        <a:schemeClr val="bg1"/>
+      </p:bgRef>
+    </p:bg>
+    <p:spTree>
+      <p:nvGrpSpPr>
+        <p:cNvPr id="1" name=""/>
+        <p:cNvGrpSpPr/>
+        <p:nvPr/>
+      </p:nvGrpSpPr>
+      <p:grpSpPr bwMode="auto">
+        <a:xfrm>
+          <a:off x="0" y="0"/>
+          <a:ext cx="0" cy="0"/>
+          <a:chOff x="0" y="0"/>
+          <a:chExt cx="0" cy="0"/>
+        </a:xfrm>
+      </p:grpSpPr>
+      <p:sp>
+        <p:nvSpPr>
+          <p:cNvPr id="1740637193" name="Header Placeholder 1"/>
+          <p:cNvSpPr>
+            <a:spLocks noGrp="1"/>
+          </p:cNvSpPr>
+          <p:nvPr>
+            <p:ph type="hdr" sz="quarter"/>
+          </p:nvPr>
+        </p:nvSpPr>
+        <p:spPr bwMode="auto">
+          <a:xfrm>
+            <a:off x="0" y="0"/>
+            <a:ext cx="2971800" cy="611716"/>
+          </a:xfrm>
+          <a:prstGeom prst="rect">
+            <a:avLst/>
+          </a:prstGeom>
+        </p:spPr>
+        <p:txBody>
+          <a:bodyPr vert="horz" lIns="91440" tIns="45720" rIns="91440" bIns="45720" anchor="t"/>
+          <a:lstStyle>
+            <a:lvl1pPr algn="l">
+              <a:defRPr sz="1200"/>
+            </a:lvl1pPr>
+          </a:lstStyle>
+          <a:p>
+            <a:pPr>
+              <a:defRPr/>
+            </a:pPr>
+            <a:endParaRPr/>
+          </a:p>
+        </p:txBody>
+      </p:sp>
+      <p:sp>
+        <p:nvSpPr>
+          <p:cNvPr id="956006218" name="Date Placeholder 2"/>
+          <p:cNvSpPr>
+            <a:spLocks noGrp="1"/>
+          </p:cNvSpPr>
+          <p:nvPr>
+            <p:ph type="dt" idx="3"/>
+          </p:nvPr>
+        </p:nvSpPr>
+        <p:spPr bwMode="auto">
+          <a:xfrm>
+            <a:off x="3886200" y="0"/>
+            <a:ext cx="2971800" cy="611716"/>
+          </a:xfrm>
+          <a:prstGeom prst="rect">
+            <a:avLst/>
+          </a:prstGeom>
+        </p:spPr>
+        <p:txBody>
+          <a:bodyPr vert="horz" lIns="91440" tIns="45720" rIns="91440" bIns="45720" anchor="t"/>
+          <a:lstStyle>
+            <a:lvl1pPr algn="r">
+              <a:defRPr sz="1200"/>
+            </a:lvl1pPr>
+          </a:lstStyle>
+          <a:p>
+            <a:pPr>
+              <a:defRPr/>
+            </a:pPr>
+            <a:fld id="{CEB7F7AB-1C30-B86B-344B-06A2F2C41E8D}" type="datetimeFigureOut">
+              <a:rPr lang="en-US"/>
+              <a:t/>
+            </a:fld>
+            <a:endParaRPr/>
+          </a:p>
+        </p:txBody>
+      </p:sp>
+      <p:sp>
+        <p:nvSpPr>
+          <p:cNvPr id="437453723" name="Footer Placeholder 3"/>
+          <p:cNvSpPr>
+            <a:spLocks noGrp="1"/>
+          </p:cNvSpPr>
+          <p:nvPr>
+            <p:ph type="ftr" sz="quarter" idx="2"/>
+          </p:nvPr>
+        </p:nvSpPr>
+        <p:spPr bwMode="auto">
+          <a:xfrm>
+            <a:off x="0" y="11580284"/>
+            <a:ext cx="2971800" cy="611716"/>
+          </a:xfrm>
+          <a:prstGeom prst="rect">
+            <a:avLst/>
+          </a:prstGeom>
+        </p:spPr>
+        <p:txBody>
+          <a:bodyPr vert="horz" lIns="91440" tIns="45720" rIns="91440" bIns="45720" anchor="b"/>
+          <a:lstStyle>
+            <a:lvl1pPr algn="l">
+              <a:defRPr sz="1200"/>
+            </a:lvl1pPr>
+          </a:lstStyle>
+          <a:p>
+            <a:pPr>
+              <a:defRPr/>
+            </a:pPr>
+            <a:endParaRPr/>
+          </a:p>
+        </p:txBody>
+      </p:sp>
+      <p:sp>
+        <p:nvSpPr>
+          <p:cNvPr id="1285886860" name="Slide Number Placeholder 4"/>
+          <p:cNvSpPr>
+            <a:spLocks noGrp="1"/>
+          </p:cNvSpPr>
+          <p:nvPr>
+            <p:ph type="sldNum" sz="quarter" idx="3"/>
+          </p:nvPr>
+        </p:nvSpPr>
+        <p:spPr bwMode="auto">
+          <a:xfrm>
+            <a:off x="3886200" y="11580284"/>
+            <a:ext cx="2971800" cy="611716"/>
+          </a:xfrm>
+          <a:prstGeom prst="rect">
+            <a:avLst/>
+          </a:prstGeom>
+        </p:spPr>
+        <p:txBody>
+          <a:bodyPr vert="horz" lIns="91440" tIns="45720" rIns="91440" bIns="45720" anchor="b"/>
+          <a:lstStyle>
+            <a:lvl1pPr algn="r">
+              <a:defRPr sz="1200"/>
+            </a:lvl1pPr>
+          </a:lstStyle>
+          <a:p>
+            <a:pPr>
+              <a:defRPr/>
+            </a:pPr>
+            <a:fld id="{0D578003-4FDE-CD77-A38D-FC7C099E987B}" type="slidenum">
+              <a:rPr/>
+              <a:t/>
+            </a:fld>
+            <a:endParaRPr/>
+          </a:p>
+        </p:txBody>
+      </p:sp>
+    </p:spTree>
+  </p:cSld>
+  <p:clrMap bg1="lt1" tx1="dk1" bg2="lt2" tx2="dk2" accent1="accent1" accent2="accent2" accent3="accent3" accent4="accent4" accent5="accent5" accent6="accent6" hlink="hlink" folHlink="folHlink"/>
+</p:handoutMaster>
+</file>
+
 <file path=ppt/notesMasters/notesMaster1.xml><?xml version="1.0" encoding="utf-8"?>
 <p:notesMaster xmlns:a="http://schemas.openxmlformats.org/drawingml/2006/main" xmlns:r="http://schemas.openxmlformats.org/officeDocument/2006/relationships" xmlns:p="http://schemas.openxmlformats.org/presentationml/2006/main">
   <p:cSld name="">
@@ -144,7 +319,7 @@
       </p:grpSpPr>
       <p:sp>
         <p:nvSpPr>
-          <p:cNvPr id="1873351210" name="Header Placeholder 1"/>
+          <p:cNvPr id="569816781" name="Header Placeholder 1"/>
           <p:cNvSpPr>
             <a:spLocks noGrp="1"/>
           </p:cNvSpPr>
@@ -178,7 +353,7 @@
       </p:sp>
       <p:sp>
         <p:nvSpPr>
-          <p:cNvPr id="658985741" name="Date Placeholder 2"/>
+          <p:cNvPr id="1729209233" name="Date Placeholder 2"/>
           <p:cNvSpPr>
             <a:spLocks noGrp="1"/>
           </p:cNvSpPr>
@@ -216,7 +391,7 @@
       </p:sp>
       <p:sp>
         <p:nvSpPr>
-          <p:cNvPr id="924250830" name="Slide Image Placeholder 3"/>
+          <p:cNvPr id="1385580106" name="Slide Image Placeholder 3"/>
           <p:cNvSpPr>
             <a:spLocks noChangeAspect="1" noGrp="1" noRot="1"/>
           </p:cNvSpPr>
@@ -252,7 +427,7 @@
       </p:sp>
       <p:sp>
         <p:nvSpPr>
-          <p:cNvPr id="1100289776" name="Notes Placeholder 4"/>
+          <p:cNvPr id="969721637" name="Notes Placeholder 4"/>
           <p:cNvSpPr>
             <a:spLocks noGrp="1"/>
           </p:cNvSpPr>
@@ -326,7 +501,7 @@
       </p:sp>
       <p:sp>
         <p:nvSpPr>
-          <p:cNvPr id="1415363040" name="Footer Placeholder 5"/>
+          <p:cNvPr id="456145931" name="Footer Placeholder 5"/>
           <p:cNvSpPr>
             <a:spLocks noGrp="1"/>
           </p:cNvSpPr>
@@ -360,7 +535,7 @@
       </p:sp>
       <p:sp>
         <p:nvSpPr>
-          <p:cNvPr id="1516205932" name="Slide Number Placeholder 6"/>
+          <p:cNvPr id="1433606508" name="Slide Number Placeholder 6"/>
           <p:cNvSpPr>
             <a:spLocks noGrp="1"/>
           </p:cNvSpPr>
@@ -495,7 +670,7 @@
 </file>
 
 <file path=ppt/notesSlides/notesSlide1.xml><?xml version="1.0" encoding="utf-8"?>
-<p:notes xmlns:a="http://schemas.openxmlformats.org/drawingml/2006/main" xmlns:r="http://schemas.openxmlformats.org/officeDocument/2006/relationships" xmlns:p="http://schemas.openxmlformats.org/presentationml/2006/main" xmlns:m="http://schemas.openxmlformats.org/officeDocument/2006/math" xmlns:w="http://schemas.openxmlformats.org/wordprocessingml/2006/main">
+<p:notes xmlns:a="http://schemas.openxmlformats.org/drawingml/2006/main" xmlns:r="http://schemas.openxmlformats.org/officeDocument/2006/relationships" xmlns:p="http://schemas.openxmlformats.org/presentationml/2006/main" xmlns:m="http://schemas.openxmlformats.org/officeDocument/2006/math" xmlns:w="http://schemas.openxmlformats.org/wordprocessingml/2006/main" showMasterSp="1">
   <p:cSld name="">
     <p:spTree>
       <p:nvGrpSpPr>
@@ -513,7 +688,7 @@
       </p:grpSpPr>
       <p:sp>
         <p:nvSpPr>
-          <p:cNvPr id="369468929" name="Slide Image Placeholder 1"/>
+          <p:cNvPr id="924934750" name="Slide Image Placeholder 1"/>
           <p:cNvSpPr>
             <a:spLocks noChangeAspect="1" noGrp="1" noRot="1"/>
           </p:cNvSpPr>
@@ -525,7 +700,7 @@
       </p:sp>
       <p:sp>
         <p:nvSpPr>
-          <p:cNvPr id="846218896" name="Notes Placeholder 2"/>
+          <p:cNvPr id="1095014586" name="Notes Placeholder 2"/>
           <p:cNvSpPr>
             <a:spLocks noGrp="1"/>
           </p:cNvSpPr>
@@ -547,7 +722,7 @@
       </p:sp>
       <p:sp>
         <p:nvSpPr>
-          <p:cNvPr id="1153070479" name="Slide Number Placeholder 3"/>
+          <p:cNvPr id="1338791676" name="Slide Number Placeholder 3"/>
           <p:cNvSpPr>
             <a:spLocks noGrp="1"/>
           </p:cNvSpPr>
@@ -580,7 +755,7 @@
 </file>
 
 <file path=ppt/notesSlides/notesSlide10.xml><?xml version="1.0" encoding="utf-8"?>
-<p:notes xmlns:a="http://schemas.openxmlformats.org/drawingml/2006/main" xmlns:r="http://schemas.openxmlformats.org/officeDocument/2006/relationships" xmlns:p="http://schemas.openxmlformats.org/presentationml/2006/main" xmlns:m="http://schemas.openxmlformats.org/officeDocument/2006/math" xmlns:w="http://schemas.openxmlformats.org/wordprocessingml/2006/main">
+<p:notes xmlns:a="http://schemas.openxmlformats.org/drawingml/2006/main" xmlns:r="http://schemas.openxmlformats.org/officeDocument/2006/relationships" xmlns:p="http://schemas.openxmlformats.org/presentationml/2006/main" xmlns:m="http://schemas.openxmlformats.org/officeDocument/2006/math" xmlns:w="http://schemas.openxmlformats.org/wordprocessingml/2006/main" showMasterSp="1">
   <p:cSld name="">
     <p:spTree>
       <p:nvGrpSpPr>
@@ -598,7 +773,7 @@
       </p:grpSpPr>
       <p:sp>
         <p:nvSpPr>
-          <p:cNvPr id="890659361" name="Slide Image Placeholder 1"/>
+          <p:cNvPr id="1201156615" name="Slide Image Placeholder 1"/>
           <p:cNvSpPr>
             <a:spLocks noChangeAspect="1" noGrp="1" noRot="1"/>
           </p:cNvSpPr>
@@ -610,7 +785,7 @@
       </p:sp>
       <p:sp>
         <p:nvSpPr>
-          <p:cNvPr id="356754422" name="Notes Placeholder 2"/>
+          <p:cNvPr id="1318154022" name="Notes Placeholder 2"/>
           <p:cNvSpPr>
             <a:spLocks noGrp="1"/>
           </p:cNvSpPr>
@@ -632,7 +807,7 @@
       </p:sp>
       <p:sp>
         <p:nvSpPr>
-          <p:cNvPr id="1549644500" name="Slide Number Placeholder 3"/>
+          <p:cNvPr id="400834818" name="Slide Number Placeholder 3"/>
           <p:cNvSpPr>
             <a:spLocks noGrp="1"/>
           </p:cNvSpPr>
@@ -665,7 +840,7 @@
 </file>
 
 <file path=ppt/notesSlides/notesSlide11.xml><?xml version="1.0" encoding="utf-8"?>
-<p:notes xmlns:a="http://schemas.openxmlformats.org/drawingml/2006/main" xmlns:r="http://schemas.openxmlformats.org/officeDocument/2006/relationships" xmlns:p="http://schemas.openxmlformats.org/presentationml/2006/main" xmlns:m="http://schemas.openxmlformats.org/officeDocument/2006/math" xmlns:w="http://schemas.openxmlformats.org/wordprocessingml/2006/main">
+<p:notes xmlns:a="http://schemas.openxmlformats.org/drawingml/2006/main" xmlns:r="http://schemas.openxmlformats.org/officeDocument/2006/relationships" xmlns:p="http://schemas.openxmlformats.org/presentationml/2006/main" xmlns:m="http://schemas.openxmlformats.org/officeDocument/2006/math" xmlns:w="http://schemas.openxmlformats.org/wordprocessingml/2006/main" showMasterSp="1">
   <p:cSld name="">
     <p:spTree>
       <p:nvGrpSpPr>
@@ -683,7 +858,7 @@
       </p:grpSpPr>
       <p:sp>
         <p:nvSpPr>
-          <p:cNvPr id="778099247" name="Slide Image Placeholder 1"/>
+          <p:cNvPr id="1024779140" name="Slide Image Placeholder 1"/>
           <p:cNvSpPr>
             <a:spLocks noChangeAspect="1" noGrp="1" noRot="1"/>
           </p:cNvSpPr>
@@ -695,7 +870,7 @@
       </p:sp>
       <p:sp>
         <p:nvSpPr>
-          <p:cNvPr id="624357855" name="Notes Placeholder 2"/>
+          <p:cNvPr id="1746084808" name="Notes Placeholder 2"/>
           <p:cNvSpPr>
             <a:spLocks noGrp="1"/>
           </p:cNvSpPr>
@@ -717,7 +892,7 @@
       </p:sp>
       <p:sp>
         <p:nvSpPr>
-          <p:cNvPr id="660881992" name="Slide Number Placeholder 3"/>
+          <p:cNvPr id="2080911610" name="Slide Number Placeholder 3"/>
           <p:cNvSpPr>
             <a:spLocks noGrp="1"/>
           </p:cNvSpPr>
@@ -750,7 +925,7 @@
 </file>
 
 <file path=ppt/notesSlides/notesSlide12.xml><?xml version="1.0" encoding="utf-8"?>
-<p:notes xmlns:a="http://schemas.openxmlformats.org/drawingml/2006/main" xmlns:r="http://schemas.openxmlformats.org/officeDocument/2006/relationships" xmlns:p="http://schemas.openxmlformats.org/presentationml/2006/main" xmlns:m="http://schemas.openxmlformats.org/officeDocument/2006/math" xmlns:w="http://schemas.openxmlformats.org/wordprocessingml/2006/main">
+<p:notes xmlns:a="http://schemas.openxmlformats.org/drawingml/2006/main" xmlns:r="http://schemas.openxmlformats.org/officeDocument/2006/relationships" xmlns:p="http://schemas.openxmlformats.org/presentationml/2006/main" xmlns:m="http://schemas.openxmlformats.org/officeDocument/2006/math" xmlns:w="http://schemas.openxmlformats.org/wordprocessingml/2006/main" showMasterSp="1">
   <p:cSld name="">
     <p:spTree>
       <p:nvGrpSpPr>
@@ -768,7 +943,7 @@
       </p:grpSpPr>
       <p:sp>
         <p:nvSpPr>
-          <p:cNvPr id="1255497921" name="Slide Image Placeholder 1"/>
+          <p:cNvPr id="1116615953" name="Slide Image Placeholder 1"/>
           <p:cNvSpPr>
             <a:spLocks noChangeAspect="1" noGrp="1" noRot="1"/>
           </p:cNvSpPr>
@@ -780,7 +955,7 @@
       </p:sp>
       <p:sp>
         <p:nvSpPr>
-          <p:cNvPr id="1355028525" name="Notes Placeholder 2"/>
+          <p:cNvPr id="1360398057" name="Notes Placeholder 2"/>
           <p:cNvSpPr>
             <a:spLocks noGrp="1"/>
           </p:cNvSpPr>
@@ -802,7 +977,7 @@
       </p:sp>
       <p:sp>
         <p:nvSpPr>
-          <p:cNvPr id="108737367" name="Slide Number Placeholder 3"/>
+          <p:cNvPr id="2092602715" name="Slide Number Placeholder 3"/>
           <p:cNvSpPr>
             <a:spLocks noGrp="1"/>
           </p:cNvSpPr>
@@ -835,7 +1010,7 @@
 </file>
 
 <file path=ppt/notesSlides/notesSlide13.xml><?xml version="1.0" encoding="utf-8"?>
-<p:notes xmlns:a="http://schemas.openxmlformats.org/drawingml/2006/main" xmlns:r="http://schemas.openxmlformats.org/officeDocument/2006/relationships" xmlns:p="http://schemas.openxmlformats.org/presentationml/2006/main" xmlns:m="http://schemas.openxmlformats.org/officeDocument/2006/math" xmlns:w="http://schemas.openxmlformats.org/wordprocessingml/2006/main">
+<p:notes xmlns:a="http://schemas.openxmlformats.org/drawingml/2006/main" xmlns:r="http://schemas.openxmlformats.org/officeDocument/2006/relationships" xmlns:p="http://schemas.openxmlformats.org/presentationml/2006/main" xmlns:m="http://schemas.openxmlformats.org/officeDocument/2006/math" xmlns:w="http://schemas.openxmlformats.org/wordprocessingml/2006/main" showMasterSp="1">
   <p:cSld name="">
     <p:spTree>
       <p:nvGrpSpPr>
@@ -853,7 +1028,7 @@
       </p:grpSpPr>
       <p:sp>
         <p:nvSpPr>
-          <p:cNvPr id="1822875849" name="Slide Image Placeholder 1"/>
+          <p:cNvPr id="1948483543" name="Slide Image Placeholder 1"/>
           <p:cNvSpPr>
             <a:spLocks noChangeAspect="1" noGrp="1" noRot="1"/>
           </p:cNvSpPr>
@@ -865,7 +1040,7 @@
       </p:sp>
       <p:sp>
         <p:nvSpPr>
-          <p:cNvPr id="1682456890" name="Notes Placeholder 2"/>
+          <p:cNvPr id="2100903356" name="Notes Placeholder 2"/>
           <p:cNvSpPr>
             <a:spLocks noGrp="1"/>
           </p:cNvSpPr>
@@ -881,17 +1056,13 @@
             <a:pPr>
               <a:defRPr/>
             </a:pPr>
-            <a:r>
-              <a:rPr lang="en-US"/>
-              <a:t>Anomaly detection is a separate study.</a:t>
-            </a:r>
             <a:endParaRPr lang="en-US"/>
           </a:p>
         </p:txBody>
       </p:sp>
       <p:sp>
         <p:nvSpPr>
-          <p:cNvPr id="382721027" name="Slide Number Placeholder 3"/>
+          <p:cNvPr id="1036641380" name="Slide Number Placeholder 3"/>
           <p:cNvSpPr>
             <a:spLocks noGrp="1"/>
           </p:cNvSpPr>
@@ -924,7 +1095,7 @@
 </file>
 
 <file path=ppt/notesSlides/notesSlide14.xml><?xml version="1.0" encoding="utf-8"?>
-<p:notes xmlns:a="http://schemas.openxmlformats.org/drawingml/2006/main" xmlns:r="http://schemas.openxmlformats.org/officeDocument/2006/relationships" xmlns:p="http://schemas.openxmlformats.org/presentationml/2006/main" xmlns:m="http://schemas.openxmlformats.org/officeDocument/2006/math" xmlns:w="http://schemas.openxmlformats.org/wordprocessingml/2006/main">
+<p:notes xmlns:a="http://schemas.openxmlformats.org/drawingml/2006/main" xmlns:r="http://schemas.openxmlformats.org/officeDocument/2006/relationships" xmlns:p="http://schemas.openxmlformats.org/presentationml/2006/main" xmlns:m="http://schemas.openxmlformats.org/officeDocument/2006/math" xmlns:w="http://schemas.openxmlformats.org/wordprocessingml/2006/main" showMasterSp="1">
   <p:cSld name="">
     <p:spTree>
       <p:nvGrpSpPr>
@@ -942,7 +1113,7 @@
       </p:grpSpPr>
       <p:sp>
         <p:nvSpPr>
-          <p:cNvPr id="1751965640" name="Slide Image Placeholder 1"/>
+          <p:cNvPr id="1096554364" name="Slide Image Placeholder 1"/>
           <p:cNvSpPr>
             <a:spLocks noChangeAspect="1" noGrp="1" noRot="1"/>
           </p:cNvSpPr>
@@ -954,7 +1125,7 @@
       </p:sp>
       <p:sp>
         <p:nvSpPr>
-          <p:cNvPr id="1594842804" name="Notes Placeholder 2"/>
+          <p:cNvPr id="1854737719" name="Notes Placeholder 2"/>
           <p:cNvSpPr>
             <a:spLocks noGrp="1"/>
           </p:cNvSpPr>
@@ -976,7 +1147,7 @@
       </p:sp>
       <p:sp>
         <p:nvSpPr>
-          <p:cNvPr id="953202886" name="Slide Number Placeholder 3"/>
+          <p:cNvPr id="1917774489" name="Slide Number Placeholder 3"/>
           <p:cNvSpPr>
             <a:spLocks noGrp="1"/>
           </p:cNvSpPr>
@@ -1009,7 +1180,7 @@
 </file>
 
 <file path=ppt/notesSlides/notesSlide2.xml><?xml version="1.0" encoding="utf-8"?>
-<p:notes xmlns:a="http://schemas.openxmlformats.org/drawingml/2006/main" xmlns:r="http://schemas.openxmlformats.org/officeDocument/2006/relationships" xmlns:p="http://schemas.openxmlformats.org/presentationml/2006/main" xmlns:m="http://schemas.openxmlformats.org/officeDocument/2006/math" xmlns:w="http://schemas.openxmlformats.org/wordprocessingml/2006/main">
+<p:notes xmlns:a="http://schemas.openxmlformats.org/drawingml/2006/main" xmlns:r="http://schemas.openxmlformats.org/officeDocument/2006/relationships" xmlns:p="http://schemas.openxmlformats.org/presentationml/2006/main" xmlns:m="http://schemas.openxmlformats.org/officeDocument/2006/math" xmlns:w="http://schemas.openxmlformats.org/wordprocessingml/2006/main" showMasterSp="1">
   <p:cSld name="">
     <p:spTree>
       <p:nvGrpSpPr>
@@ -1027,7 +1198,7 @@
       </p:grpSpPr>
       <p:sp>
         <p:nvSpPr>
-          <p:cNvPr id="894128759" name="Slide Image Placeholder 1"/>
+          <p:cNvPr id="679615072" name="Slide Image Placeholder 1"/>
           <p:cNvSpPr>
             <a:spLocks noChangeAspect="1" noGrp="1" noRot="1"/>
           </p:cNvSpPr>
@@ -1039,7 +1210,7 @@
       </p:sp>
       <p:sp>
         <p:nvSpPr>
-          <p:cNvPr id="696544947" name="Notes Placeholder 2"/>
+          <p:cNvPr id="298110007" name="Notes Placeholder 2"/>
           <p:cNvSpPr>
             <a:spLocks noGrp="1"/>
           </p:cNvSpPr>
@@ -1061,7 +1232,7 @@
       </p:sp>
       <p:sp>
         <p:nvSpPr>
-          <p:cNvPr id="1172201784" name="Slide Number Placeholder 3"/>
+          <p:cNvPr id="512741771" name="Slide Number Placeholder 3"/>
           <p:cNvSpPr>
             <a:spLocks noGrp="1"/>
           </p:cNvSpPr>
@@ -1094,7 +1265,7 @@
 </file>
 
 <file path=ppt/notesSlides/notesSlide3.xml><?xml version="1.0" encoding="utf-8"?>
-<p:notes xmlns:a="http://schemas.openxmlformats.org/drawingml/2006/main" xmlns:r="http://schemas.openxmlformats.org/officeDocument/2006/relationships" xmlns:p="http://schemas.openxmlformats.org/presentationml/2006/main" xmlns:m="http://schemas.openxmlformats.org/officeDocument/2006/math" xmlns:w="http://schemas.openxmlformats.org/wordprocessingml/2006/main">
+<p:notes xmlns:a="http://schemas.openxmlformats.org/drawingml/2006/main" xmlns:r="http://schemas.openxmlformats.org/officeDocument/2006/relationships" xmlns:p="http://schemas.openxmlformats.org/presentationml/2006/main" xmlns:m="http://schemas.openxmlformats.org/officeDocument/2006/math" xmlns:w="http://schemas.openxmlformats.org/wordprocessingml/2006/main" showMasterSp="1">
   <p:cSld name="">
     <p:spTree>
       <p:nvGrpSpPr>
@@ -1112,7 +1283,7 @@
       </p:grpSpPr>
       <p:sp>
         <p:nvSpPr>
-          <p:cNvPr id="271857614" name="Slide Image Placeholder 1"/>
+          <p:cNvPr id="1350321503" name="Slide Image Placeholder 1"/>
           <p:cNvSpPr>
             <a:spLocks noChangeAspect="1" noGrp="1" noRot="1"/>
           </p:cNvSpPr>
@@ -1124,7 +1295,7 @@
       </p:sp>
       <p:sp>
         <p:nvSpPr>
-          <p:cNvPr id="250486579" name="Notes Placeholder 2"/>
+          <p:cNvPr id="1470217283" name="Notes Placeholder 2"/>
           <p:cNvSpPr>
             <a:spLocks noGrp="1"/>
           </p:cNvSpPr>
@@ -1146,7 +1317,7 @@
       </p:sp>
       <p:sp>
         <p:nvSpPr>
-          <p:cNvPr id="919549776" name="Slide Number Placeholder 3"/>
+          <p:cNvPr id="1059706366" name="Slide Number Placeholder 3"/>
           <p:cNvSpPr>
             <a:spLocks noGrp="1"/>
           </p:cNvSpPr>
@@ -1179,7 +1350,7 @@
 </file>
 
 <file path=ppt/notesSlides/notesSlide4.xml><?xml version="1.0" encoding="utf-8"?>
-<p:notes xmlns:a="http://schemas.openxmlformats.org/drawingml/2006/main" xmlns:r="http://schemas.openxmlformats.org/officeDocument/2006/relationships" xmlns:p="http://schemas.openxmlformats.org/presentationml/2006/main" xmlns:m="http://schemas.openxmlformats.org/officeDocument/2006/math" xmlns:w="http://schemas.openxmlformats.org/wordprocessingml/2006/main">
+<p:notes xmlns:a="http://schemas.openxmlformats.org/drawingml/2006/main" xmlns:r="http://schemas.openxmlformats.org/officeDocument/2006/relationships" xmlns:p="http://schemas.openxmlformats.org/presentationml/2006/main" xmlns:m="http://schemas.openxmlformats.org/officeDocument/2006/math" xmlns:w="http://schemas.openxmlformats.org/wordprocessingml/2006/main" showMasterSp="1">
   <p:cSld name="">
     <p:spTree>
       <p:nvGrpSpPr>
@@ -1197,7 +1368,7 @@
       </p:grpSpPr>
       <p:sp>
         <p:nvSpPr>
-          <p:cNvPr id="1712204821" name="Slide Image Placeholder 1"/>
+          <p:cNvPr id="1654449848" name="Slide Image Placeholder 1"/>
           <p:cNvSpPr>
             <a:spLocks noChangeAspect="1" noGrp="1" noRot="1"/>
           </p:cNvSpPr>
@@ -1209,7 +1380,7 @@
       </p:sp>
       <p:sp>
         <p:nvSpPr>
-          <p:cNvPr id="1034494174" name="Notes Placeholder 2"/>
+          <p:cNvPr id="1638670974" name="Notes Placeholder 2"/>
           <p:cNvSpPr>
             <a:spLocks noGrp="1"/>
           </p:cNvSpPr>
@@ -1231,7 +1402,7 @@
       </p:sp>
       <p:sp>
         <p:nvSpPr>
-          <p:cNvPr id="1933581288" name="Slide Number Placeholder 3"/>
+          <p:cNvPr id="1539887494" name="Slide Number Placeholder 3"/>
           <p:cNvSpPr>
             <a:spLocks noGrp="1"/>
           </p:cNvSpPr>
@@ -1264,7 +1435,7 @@
 </file>
 
 <file path=ppt/notesSlides/notesSlide5.xml><?xml version="1.0" encoding="utf-8"?>
-<p:notes xmlns:a="http://schemas.openxmlformats.org/drawingml/2006/main" xmlns:r="http://schemas.openxmlformats.org/officeDocument/2006/relationships" xmlns:p="http://schemas.openxmlformats.org/presentationml/2006/main" xmlns:m="http://schemas.openxmlformats.org/officeDocument/2006/math" xmlns:w="http://schemas.openxmlformats.org/wordprocessingml/2006/main">
+<p:notes xmlns:a="http://schemas.openxmlformats.org/drawingml/2006/main" xmlns:r="http://schemas.openxmlformats.org/officeDocument/2006/relationships" xmlns:p="http://schemas.openxmlformats.org/presentationml/2006/main" xmlns:m="http://schemas.openxmlformats.org/officeDocument/2006/math" xmlns:w="http://schemas.openxmlformats.org/wordprocessingml/2006/main" showMasterSp="1">
   <p:cSld name="">
     <p:spTree>
       <p:nvGrpSpPr>
@@ -1282,7 +1453,7 @@
       </p:grpSpPr>
       <p:sp>
         <p:nvSpPr>
-          <p:cNvPr id="1735617726" name="Slide Image Placeholder 1"/>
+          <p:cNvPr id="1104988088" name="Slide Image Placeholder 1"/>
           <p:cNvSpPr>
             <a:spLocks noChangeAspect="1" noGrp="1" noRot="1"/>
           </p:cNvSpPr>
@@ -1294,7 +1465,7 @@
       </p:sp>
       <p:sp>
         <p:nvSpPr>
-          <p:cNvPr id="453751830" name="Notes Placeholder 2"/>
+          <p:cNvPr id="1783120175" name="Notes Placeholder 2"/>
           <p:cNvSpPr>
             <a:spLocks noGrp="1"/>
           </p:cNvSpPr>
@@ -1316,7 +1487,7 @@
       </p:sp>
       <p:sp>
         <p:nvSpPr>
-          <p:cNvPr id="124014279" name="Slide Number Placeholder 3"/>
+          <p:cNvPr id="99314271" name="Slide Number Placeholder 3"/>
           <p:cNvSpPr>
             <a:spLocks noGrp="1"/>
           </p:cNvSpPr>
@@ -1349,7 +1520,7 @@
 </file>
 
 <file path=ppt/notesSlides/notesSlide6.xml><?xml version="1.0" encoding="utf-8"?>
-<p:notes xmlns:a="http://schemas.openxmlformats.org/drawingml/2006/main" xmlns:r="http://schemas.openxmlformats.org/officeDocument/2006/relationships" xmlns:p="http://schemas.openxmlformats.org/presentationml/2006/main" xmlns:m="http://schemas.openxmlformats.org/officeDocument/2006/math" xmlns:w="http://schemas.openxmlformats.org/wordprocessingml/2006/main">
+<p:notes xmlns:a="http://schemas.openxmlformats.org/drawingml/2006/main" xmlns:r="http://schemas.openxmlformats.org/officeDocument/2006/relationships" xmlns:p="http://schemas.openxmlformats.org/presentationml/2006/main" xmlns:m="http://schemas.openxmlformats.org/officeDocument/2006/math" xmlns:w="http://schemas.openxmlformats.org/wordprocessingml/2006/main" showMasterSp="1">
   <p:cSld name="">
     <p:spTree>
       <p:nvGrpSpPr>
@@ -1367,7 +1538,7 @@
       </p:grpSpPr>
       <p:sp>
         <p:nvSpPr>
-          <p:cNvPr id="715068522" name="Slide Image Placeholder 1"/>
+          <p:cNvPr id="115008776" name="Slide Image Placeholder 1"/>
           <p:cNvSpPr>
             <a:spLocks noChangeAspect="1" noGrp="1" noRot="1"/>
           </p:cNvSpPr>
@@ -1379,7 +1550,7 @@
       </p:sp>
       <p:sp>
         <p:nvSpPr>
-          <p:cNvPr id="770985462" name="Notes Placeholder 2"/>
+          <p:cNvPr id="1945120008" name="Notes Placeholder 2"/>
           <p:cNvSpPr>
             <a:spLocks noGrp="1"/>
           </p:cNvSpPr>
@@ -1401,7 +1572,7 @@
       </p:sp>
       <p:sp>
         <p:nvSpPr>
-          <p:cNvPr id="2079920332" name="Slide Number Placeholder 3"/>
+          <p:cNvPr id="51458608" name="Slide Number Placeholder 3"/>
           <p:cNvSpPr>
             <a:spLocks noGrp="1"/>
           </p:cNvSpPr>
@@ -1434,7 +1605,7 @@
 </file>
 
 <file path=ppt/notesSlides/notesSlide7.xml><?xml version="1.0" encoding="utf-8"?>
-<p:notes xmlns:a="http://schemas.openxmlformats.org/drawingml/2006/main" xmlns:r="http://schemas.openxmlformats.org/officeDocument/2006/relationships" xmlns:p="http://schemas.openxmlformats.org/presentationml/2006/main" xmlns:m="http://schemas.openxmlformats.org/officeDocument/2006/math" xmlns:w="http://schemas.openxmlformats.org/wordprocessingml/2006/main">
+<p:notes xmlns:a="http://schemas.openxmlformats.org/drawingml/2006/main" xmlns:r="http://schemas.openxmlformats.org/officeDocument/2006/relationships" xmlns:p="http://schemas.openxmlformats.org/presentationml/2006/main" xmlns:m="http://schemas.openxmlformats.org/officeDocument/2006/math" xmlns:w="http://schemas.openxmlformats.org/wordprocessingml/2006/main" showMasterSp="1">
   <p:cSld name="">
     <p:spTree>
       <p:nvGrpSpPr>
@@ -1452,7 +1623,7 @@
       </p:grpSpPr>
       <p:sp>
         <p:nvSpPr>
-          <p:cNvPr id="621977342" name="Slide Image Placeholder 1"/>
+          <p:cNvPr id="713577637" name="Slide Image Placeholder 1"/>
           <p:cNvSpPr>
             <a:spLocks noChangeAspect="1" noGrp="1" noRot="1"/>
           </p:cNvSpPr>
@@ -1464,7 +1635,7 @@
       </p:sp>
       <p:sp>
         <p:nvSpPr>
-          <p:cNvPr id="493950655" name="Notes Placeholder 2"/>
+          <p:cNvPr id="284374549" name="Notes Placeholder 2"/>
           <p:cNvSpPr>
             <a:spLocks noGrp="1"/>
           </p:cNvSpPr>
@@ -1490,7 +1661,7 @@
       </p:sp>
       <p:sp>
         <p:nvSpPr>
-          <p:cNvPr id="6901281" name="Slide Number Placeholder 3"/>
+          <p:cNvPr id="2143915257" name="Slide Number Placeholder 3"/>
           <p:cNvSpPr>
             <a:spLocks noGrp="1"/>
           </p:cNvSpPr>
@@ -1523,7 +1694,7 @@
 </file>
 
 <file path=ppt/notesSlides/notesSlide8.xml><?xml version="1.0" encoding="utf-8"?>
-<p:notes xmlns:a="http://schemas.openxmlformats.org/drawingml/2006/main" xmlns:r="http://schemas.openxmlformats.org/officeDocument/2006/relationships" xmlns:p="http://schemas.openxmlformats.org/presentationml/2006/main" xmlns:m="http://schemas.openxmlformats.org/officeDocument/2006/math" xmlns:w="http://schemas.openxmlformats.org/wordprocessingml/2006/main">
+<p:notes xmlns:a="http://schemas.openxmlformats.org/drawingml/2006/main" xmlns:r="http://schemas.openxmlformats.org/officeDocument/2006/relationships" xmlns:p="http://schemas.openxmlformats.org/presentationml/2006/main" xmlns:m="http://schemas.openxmlformats.org/officeDocument/2006/math" xmlns:w="http://schemas.openxmlformats.org/wordprocessingml/2006/main" showMasterSp="1">
   <p:cSld name="">
     <p:spTree>
       <p:nvGrpSpPr>
@@ -1541,7 +1712,7 @@
       </p:grpSpPr>
       <p:sp>
         <p:nvSpPr>
-          <p:cNvPr id="925134077" name="Slide Image Placeholder 1"/>
+          <p:cNvPr id="1999519604" name="Slide Image Placeholder 1"/>
           <p:cNvSpPr>
             <a:spLocks noChangeAspect="1" noGrp="1" noRot="1"/>
           </p:cNvSpPr>
@@ -1553,7 +1724,7 @@
       </p:sp>
       <p:sp>
         <p:nvSpPr>
-          <p:cNvPr id="1065711561" name="Notes Placeholder 2"/>
+          <p:cNvPr id="1614341271" name="Notes Placeholder 2"/>
           <p:cNvSpPr>
             <a:spLocks noGrp="1"/>
           </p:cNvSpPr>
@@ -1579,7 +1750,7 @@
       </p:sp>
       <p:sp>
         <p:nvSpPr>
-          <p:cNvPr id="548388404" name="Slide Number Placeholder 3"/>
+          <p:cNvPr id="1529312598" name="Slide Number Placeholder 3"/>
           <p:cNvSpPr>
             <a:spLocks noGrp="1"/>
           </p:cNvSpPr>
@@ -1612,7 +1783,7 @@
 </file>
 
 <file path=ppt/notesSlides/notesSlide9.xml><?xml version="1.0" encoding="utf-8"?>
-<p:notes xmlns:a="http://schemas.openxmlformats.org/drawingml/2006/main" xmlns:r="http://schemas.openxmlformats.org/officeDocument/2006/relationships" xmlns:p="http://schemas.openxmlformats.org/presentationml/2006/main" xmlns:m="http://schemas.openxmlformats.org/officeDocument/2006/math" xmlns:w="http://schemas.openxmlformats.org/wordprocessingml/2006/main">
+<p:notes xmlns:a="http://schemas.openxmlformats.org/drawingml/2006/main" xmlns:r="http://schemas.openxmlformats.org/officeDocument/2006/relationships" xmlns:p="http://schemas.openxmlformats.org/presentationml/2006/main" xmlns:m="http://schemas.openxmlformats.org/officeDocument/2006/math" xmlns:w="http://schemas.openxmlformats.org/wordprocessingml/2006/main" showMasterSp="1">
   <p:cSld name="">
     <p:spTree>
       <p:nvGrpSpPr>
@@ -1630,7 +1801,7 @@
       </p:grpSpPr>
       <p:sp>
         <p:nvSpPr>
-          <p:cNvPr id="215841278" name="Slide Image Placeholder 1"/>
+          <p:cNvPr id="923141356" name="Slide Image Placeholder 1"/>
           <p:cNvSpPr>
             <a:spLocks noChangeAspect="1" noGrp="1" noRot="1"/>
           </p:cNvSpPr>
@@ -1642,7 +1813,7 @@
       </p:sp>
       <p:sp>
         <p:nvSpPr>
-          <p:cNvPr id="770081803" name="Notes Placeholder 2"/>
+          <p:cNvPr id="111446499" name="Notes Placeholder 2"/>
           <p:cNvSpPr>
             <a:spLocks noGrp="1"/>
           </p:cNvSpPr>
@@ -1664,7 +1835,7 @@
       </p:sp>
       <p:sp>
         <p:nvSpPr>
-          <p:cNvPr id="374617412" name="Slide Number Placeholder 3"/>
+          <p:cNvPr id="22382222" name="Slide Number Placeholder 3"/>
           <p:cNvSpPr>
             <a:spLocks noGrp="1"/>
           </p:cNvSpPr>
@@ -1752,7 +1923,7 @@
       </p:grpSpPr>
       <p:sp>
         <p:nvSpPr>
-          <p:cNvPr id="304920442" name="Title Placeholder 1"/>
+          <p:cNvPr id="850676402" name="Title Placeholder 1"/>
           <p:cNvSpPr/>
           <p:nvPr>
             <p:ph type="title"/>
@@ -1801,7 +1972,7 @@
       </p:sp>
       <p:sp>
         <p:nvSpPr>
-          <p:cNvPr id="511316979" name="Text Placeholder 2"/>
+          <p:cNvPr id="480343884" name="Text Placeholder 2"/>
           <p:cNvSpPr/>
           <p:nvPr>
             <p:ph type="body" idx="101"/>
@@ -1882,7 +2053,7 @@
       </p:grpSpPr>
       <p:sp>
         <p:nvSpPr>
-          <p:cNvPr id="327926389" name="Title Placeholder 1"/>
+          <p:cNvPr id="1313899555" name="Title Placeholder 1"/>
           <p:cNvSpPr/>
           <p:nvPr>
             <p:ph type="title"/>
@@ -1931,7 +2102,7 @@
       </p:sp>
       <p:sp>
         <p:nvSpPr>
-          <p:cNvPr id="970352548" name="Text Placeholder 2"/>
+          <p:cNvPr id="1764909497" name="Text Placeholder 2"/>
           <p:cNvSpPr/>
           <p:nvPr>
             <p:ph type="body" idx="101"/>
@@ -2265,7 +2436,7 @@
       </p:grpSpPr>
       <p:sp>
         <p:nvSpPr>
-          <p:cNvPr id="640523389" name="Text 0"/>
+          <p:cNvPr id="1877123973" name="Text 0"/>
           <p:cNvSpPr/>
           <p:nvPr/>
         </p:nvSpPr>
@@ -2294,7 +2465,7 @@
               <a:defRPr/>
             </a:pPr>
             <a:r>
-              <a:rPr lang="en-US" sz="1400" spc="100">
+              <a:rPr lang="en-US" sz="1600" spc="100">
                 <a:solidFill>
                   <a:srgbClr val="1D4ED8"/>
                 </a:solidFill>
@@ -2304,13 +2475,13 @@
               </a:rPr>
               <a:t>M.Sc. THESIS PROPOSAL · REVISED APPROACH</a:t>
             </a:r>
-            <a:endParaRPr lang="en-US" sz="1400"/>
+            <a:endParaRPr lang="en-US" sz="1600"/>
           </a:p>
         </p:txBody>
       </p:sp>
       <p:sp>
         <p:nvSpPr>
-          <p:cNvPr id="399754003" name="Text 1"/>
+          <p:cNvPr id="189333904" name="Text 1"/>
           <p:cNvSpPr/>
           <p:nvPr>
             <p:ph type="title"/>
@@ -2341,7 +2512,7 @@
               <a:defRPr/>
             </a:pPr>
             <a:r>
-              <a:rPr lang="en-US" sz="3600" b="1" i="0">
+              <a:rPr lang="en-US" sz="4800" b="1" i="0">
                 <a:solidFill>
                   <a:srgbClr val="1E3A8A"/>
                 </a:solidFill>
@@ -2352,7 +2523,7 @@
               <a:t>Zone-wise PQC and QKD </a:t>
             </a:r>
             <a:br>
-              <a:rPr lang="en-US" sz="3600" b="1" i="0">
+              <a:rPr lang="en-US" sz="4800" b="1" i="0">
                 <a:solidFill>
                   <a:srgbClr val="1E3A8A"/>
                 </a:solidFill>
@@ -2362,7 +2533,7 @@
               </a:rPr>
             </a:br>
             <a:r>
-              <a:rPr lang="en-US" sz="3600" b="1" i="0">
+              <a:rPr lang="en-US" sz="4800" b="1" i="0">
                 <a:solidFill>
                   <a:srgbClr val="1E3A8A"/>
                 </a:solidFill>
@@ -2372,19 +2543,19 @@
               </a:rPr>
               <a:t>for SMR control systems</a:t>
             </a:r>
-            <a:endParaRPr lang="en-US" sz="4600"/>
+            <a:endParaRPr lang="en-US" sz="4800"/>
           </a:p>
         </p:txBody>
       </p:sp>
       <p:sp>
         <p:nvSpPr>
-          <p:cNvPr id="663887776" name="Text 2"/>
+          <p:cNvPr id="1922379374" name="Text 2"/>
           <p:cNvSpPr/>
           <p:nvPr/>
         </p:nvSpPr>
         <p:spPr bwMode="auto">
           <a:xfrm>
-            <a:off x="812799" y="3337873"/>
+            <a:off x="812799" y="3337872"/>
             <a:ext cx="10883392" cy="327620"/>
           </a:xfrm>
           <a:prstGeom prst="rect">
@@ -2395,7 +2566,7 @@
         </p:spPr>
         <p:txBody>
           <a:bodyPr vertOverflow="overflow" horzOverflow="overflow" vert="horz" wrap="square" lIns="0" tIns="0" rIns="0" bIns="0" numCol="1" spcCol="0" rtlCol="0" fromWordArt="0" anchor="t" anchorCtr="0" forceAA="0" upright="0" compatLnSpc="0">
-            <a:normAutofit fontScale="95000" lnSpcReduction="1000"/>
+            <a:normAutofit fontScale="85000" lnSpcReduction="3000"/>
           </a:bodyPr>
           <a:lstStyle/>
           <a:p>
@@ -2407,7 +2578,7 @@
               <a:defRPr/>
             </a:pPr>
             <a:r>
-              <a:rPr lang="en-US" sz="2000" b="1">
+              <a:rPr lang="en-US" sz="2200" b="1">
                 <a:solidFill>
                   <a:srgbClr val="111111"/>
                 </a:solidFill>
@@ -2417,7 +2588,7 @@
               </a:rPr>
               <a:t>Where does post-quantum cryptography suffice, and where does QKD add measurable value?</a:t>
             </a:r>
-            <a:endParaRPr sz="2000" b="1"/>
+            <a:endParaRPr sz="2200" b="1"/>
           </a:p>
         </p:txBody>
       </p:sp>
@@ -2463,7 +2634,7 @@
       </p:grpSpPr>
       <p:sp>
         <p:nvSpPr>
-          <p:cNvPr id="821733141" name="Text 0"/>
+          <p:cNvPr id="2140823212" name="Text 0"/>
           <p:cNvSpPr/>
           <p:nvPr>
             <p:ph type="title"/>
@@ -2510,13 +2681,13 @@
       </p:sp>
       <p:sp>
         <p:nvSpPr>
-          <p:cNvPr id="1245787077" name="Text 1"/>
+          <p:cNvPr id="347261813" name="Text 1"/>
           <p:cNvSpPr/>
           <p:nvPr/>
         </p:nvSpPr>
         <p:spPr bwMode="auto">
           <a:xfrm>
-            <a:off x="825499" y="1941714"/>
+            <a:off x="825498" y="1941714"/>
             <a:ext cx="10883392" cy="608210"/>
           </a:xfrm>
           <a:prstGeom prst="rect">
@@ -2555,14 +2726,14 @@
       </p:sp>
       <p:graphicFrame>
         <p:nvGraphicFramePr>
-          <p:cNvPr id="277526951" name="Table 0"/>
+          <p:cNvPr id="1817860226" name="Table 0"/>
           <p:cNvGraphicFramePr>
             <a:graphicFrameLocks xmlns:a="http://schemas.openxmlformats.org/drawingml/2006/main" noGrp="1"/>
           </p:cNvGraphicFramePr>
           <p:nvPr/>
         </p:nvGraphicFramePr>
         <p:xfrm rot="0">
-          <a:off x="825499" y="3191551"/>
+          <a:off x="825498" y="3191551"/>
           <a:ext cx="10553700" cy="1162943"/>
         </p:xfrm>
         <a:graphic>
@@ -3161,7 +3332,7 @@
       </p:grpSpPr>
       <p:sp>
         <p:nvSpPr>
-          <p:cNvPr id="116985757" name="Text 0"/>
+          <p:cNvPr id="2127376281" name="Text 0"/>
           <p:cNvSpPr/>
           <p:nvPr>
             <p:ph type="title"/>
@@ -3208,14 +3379,14 @@
       </p:sp>
       <p:graphicFrame>
         <p:nvGraphicFramePr>
-          <p:cNvPr id="1525008008" name="Table 0"/>
+          <p:cNvPr id="474133068" name="Table 0"/>
           <p:cNvGraphicFramePr>
             <a:graphicFrameLocks xmlns:a="http://schemas.openxmlformats.org/drawingml/2006/main" noGrp="1"/>
           </p:cNvGraphicFramePr>
           <p:nvPr/>
         </p:nvGraphicFramePr>
         <p:xfrm rot="0">
-          <a:off x="825499" y="1940610"/>
+          <a:off x="825498" y="1940610"/>
           <a:ext cx="10553700" cy="3488829"/>
         </p:xfrm>
         <a:graphic>
@@ -3914,7 +4085,7 @@
       </p:grpSpPr>
       <p:sp>
         <p:nvSpPr>
-          <p:cNvPr id="1130452735" name="Text 0"/>
+          <p:cNvPr id="1699725530" name="Text 0"/>
           <p:cNvSpPr/>
           <p:nvPr>
             <p:ph type="title"/>
@@ -3961,7 +4132,7 @@
       </p:sp>
       <p:sp>
         <p:nvSpPr>
-          <p:cNvPr id="678823423" name="Shape 1"/>
+          <p:cNvPr id="734298308" name="Shape 1"/>
           <p:cNvSpPr/>
           <p:nvPr/>
         </p:nvSpPr>
@@ -3997,7 +4168,7 @@
       </p:sp>
       <p:sp>
         <p:nvSpPr>
-          <p:cNvPr id="245524505" name="Text 2"/>
+          <p:cNvPr id="519825868" name="Text 2"/>
           <p:cNvSpPr/>
           <p:nvPr/>
         </p:nvSpPr>
@@ -4042,7 +4213,7 @@
       </p:sp>
       <p:sp>
         <p:nvSpPr>
-          <p:cNvPr id="474552321" name="Text 3"/>
+          <p:cNvPr id="843234772" name="Text 3"/>
           <p:cNvSpPr/>
           <p:nvPr/>
         </p:nvSpPr>
@@ -4087,7 +4258,7 @@
       </p:sp>
       <p:sp>
         <p:nvSpPr>
-          <p:cNvPr id="58814083" name="Shape 4"/>
+          <p:cNvPr id="1290622082" name="Shape 4"/>
           <p:cNvSpPr/>
           <p:nvPr/>
         </p:nvSpPr>
@@ -4123,7 +4294,7 @@
       </p:sp>
       <p:sp>
         <p:nvSpPr>
-          <p:cNvPr id="909485686" name="Text 5"/>
+          <p:cNvPr id="1029125386" name="Text 5"/>
           <p:cNvSpPr/>
           <p:nvPr/>
         </p:nvSpPr>
@@ -4168,7 +4339,7 @@
       </p:sp>
       <p:sp>
         <p:nvSpPr>
-          <p:cNvPr id="1363827386" name="Text 6"/>
+          <p:cNvPr id="723575413" name="Text 6"/>
           <p:cNvSpPr/>
           <p:nvPr/>
         </p:nvSpPr>
@@ -4213,7 +4384,7 @@
       </p:sp>
       <p:sp>
         <p:nvSpPr>
-          <p:cNvPr id="1246971641" name="Shape 7"/>
+          <p:cNvPr id="1360554485" name="Shape 7"/>
           <p:cNvSpPr/>
           <p:nvPr/>
         </p:nvSpPr>
@@ -4249,7 +4420,7 @@
       </p:sp>
       <p:sp>
         <p:nvSpPr>
-          <p:cNvPr id="1956453397" name="Text 8"/>
+          <p:cNvPr id="1845658589" name="Text 8"/>
           <p:cNvSpPr/>
           <p:nvPr/>
         </p:nvSpPr>
@@ -4294,7 +4465,7 @@
       </p:sp>
       <p:sp>
         <p:nvSpPr>
-          <p:cNvPr id="108159749" name="Text 9"/>
+          <p:cNvPr id="434270698" name="Text 9"/>
           <p:cNvSpPr/>
           <p:nvPr/>
         </p:nvSpPr>
@@ -4339,7 +4510,7 @@
       </p:sp>
       <p:sp>
         <p:nvSpPr>
-          <p:cNvPr id="1168189554" name="Shape 10"/>
+          <p:cNvPr id="753760466" name="Shape 10"/>
           <p:cNvSpPr/>
           <p:nvPr/>
         </p:nvSpPr>
@@ -4375,7 +4546,7 @@
       </p:sp>
       <p:sp>
         <p:nvSpPr>
-          <p:cNvPr id="1081305237" name="Text 11"/>
+          <p:cNvPr id="880003746" name="Text 11"/>
           <p:cNvSpPr/>
           <p:nvPr/>
         </p:nvSpPr>
@@ -4420,7 +4591,7 @@
       </p:sp>
       <p:sp>
         <p:nvSpPr>
-          <p:cNvPr id="1376597946" name="Text 12"/>
+          <p:cNvPr id="701107410" name="Text 12"/>
           <p:cNvSpPr/>
           <p:nvPr/>
         </p:nvSpPr>
@@ -4505,7 +4676,7 @@
       </p:grpSpPr>
       <p:sp>
         <p:nvSpPr>
-          <p:cNvPr id="862188746" name="Text 0"/>
+          <p:cNvPr id="1523631644" name="Text 0"/>
           <p:cNvSpPr/>
           <p:nvPr>
             <p:ph type="title"/>
@@ -4552,7 +4723,7 @@
       </p:sp>
       <p:sp>
         <p:nvSpPr>
-          <p:cNvPr id="1612944534" name="Shape 1"/>
+          <p:cNvPr id="1344130322" name="Shape 1"/>
           <p:cNvSpPr/>
           <p:nvPr/>
         </p:nvSpPr>
@@ -4588,7 +4759,7 @@
       </p:sp>
       <p:sp>
         <p:nvSpPr>
-          <p:cNvPr id="1702968365" name="Text 2"/>
+          <p:cNvPr id="1990170741" name="Text 2"/>
           <p:cNvSpPr/>
           <p:nvPr/>
         </p:nvSpPr>
@@ -4633,7 +4804,7 @@
       </p:sp>
       <p:sp>
         <p:nvSpPr>
-          <p:cNvPr id="654908679" name="Text 3"/>
+          <p:cNvPr id="829663234" name="Text 3"/>
           <p:cNvSpPr/>
           <p:nvPr/>
         </p:nvSpPr>
@@ -4678,7 +4849,7 @@
       </p:sp>
       <p:sp>
         <p:nvSpPr>
-          <p:cNvPr id="2055120316" name="Shape 4"/>
+          <p:cNvPr id="488591855" name="Shape 4"/>
           <p:cNvSpPr/>
           <p:nvPr/>
         </p:nvSpPr>
@@ -4714,7 +4885,7 @@
       </p:sp>
       <p:sp>
         <p:nvSpPr>
-          <p:cNvPr id="715315148" name="Text 5"/>
+          <p:cNvPr id="1196495098" name="Text 5"/>
           <p:cNvSpPr/>
           <p:nvPr/>
         </p:nvSpPr>
@@ -4759,7 +4930,7 @@
       </p:sp>
       <p:sp>
         <p:nvSpPr>
-          <p:cNvPr id="1176078113" name="Text 6"/>
+          <p:cNvPr id="1697809708" name="Text 6"/>
           <p:cNvSpPr/>
           <p:nvPr/>
         </p:nvSpPr>
@@ -4804,7 +4975,7 @@
       </p:sp>
       <p:sp>
         <p:nvSpPr>
-          <p:cNvPr id="1212712247" name="Shape 7"/>
+          <p:cNvPr id="1443343016" name="Shape 7"/>
           <p:cNvSpPr/>
           <p:nvPr/>
         </p:nvSpPr>
@@ -4840,7 +5011,7 @@
       </p:sp>
       <p:sp>
         <p:nvSpPr>
-          <p:cNvPr id="2025266563" name="Text 8"/>
+          <p:cNvPr id="205436274" name="Text 8"/>
           <p:cNvSpPr/>
           <p:nvPr/>
         </p:nvSpPr>
@@ -4885,7 +5056,7 @@
       </p:sp>
       <p:sp>
         <p:nvSpPr>
-          <p:cNvPr id="1900334202" name="Text 9"/>
+          <p:cNvPr id="861273536" name="Text 9"/>
           <p:cNvSpPr/>
           <p:nvPr/>
         </p:nvSpPr>
@@ -4970,7 +5141,7 @@
       </p:grpSpPr>
       <p:sp>
         <p:nvSpPr>
-          <p:cNvPr id="77929040" name="Text 0"/>
+          <p:cNvPr id="136625051" name="Text 0"/>
           <p:cNvSpPr/>
           <p:nvPr>
             <p:ph type="title"/>
@@ -5017,14 +5188,14 @@
       </p:sp>
       <p:sp>
         <p:nvSpPr>
-          <p:cNvPr id="223382551" name="Text 1"/>
+          <p:cNvPr id="1029128414" name="Text 1"/>
           <p:cNvSpPr/>
           <p:nvPr/>
         </p:nvSpPr>
         <p:spPr bwMode="auto">
           <a:xfrm flipH="0" flipV="0">
             <a:off x="890015" y="2259214"/>
-            <a:ext cx="10806175" cy="3483393"/>
+            <a:ext cx="10806175" cy="3483392"/>
           </a:xfrm>
           <a:prstGeom prst="rect">
             <a:avLst/>
@@ -5183,7 +5354,7 @@
       </p:grpSpPr>
       <p:sp>
         <p:nvSpPr>
-          <p:cNvPr id="1560966404" name="Text 0"/>
+          <p:cNvPr id="1836300087" name="Text 0"/>
           <p:cNvSpPr/>
           <p:nvPr>
             <p:ph type="title"/>
@@ -5214,7 +5385,7 @@
               <a:defRPr/>
             </a:pPr>
             <a:r>
-              <a:rPr lang="en-US" sz="3200" b="0" i="0">
+              <a:rPr lang="en-US" sz="4800" b="0" i="0">
                 <a:solidFill>
                   <a:srgbClr val="1E3A8A"/>
                 </a:solidFill>
@@ -5224,20 +5395,20 @@
               </a:rPr>
               <a:t>Why the approach changed</a:t>
             </a:r>
-            <a:endParaRPr lang="en-US" sz="3200"/>
+            <a:endParaRPr lang="en-US" sz="4800"/>
           </a:p>
         </p:txBody>
       </p:sp>
       <p:sp>
         <p:nvSpPr>
-          <p:cNvPr id="351666124" name="Shape 1"/>
+          <p:cNvPr id="1284849458" name="Shape 1"/>
           <p:cNvSpPr/>
           <p:nvPr/>
         </p:nvSpPr>
         <p:spPr bwMode="auto">
-          <a:xfrm>
-            <a:off x="822324" y="2006457"/>
-            <a:ext cx="3384550" cy="1636812"/>
+          <a:xfrm flipH="0" flipV="0">
+            <a:off x="822323" y="2006456"/>
+            <a:ext cx="3384549" cy="2466151"/>
           </a:xfrm>
           <a:prstGeom prst="roundRect">
             <a:avLst>
@@ -5260,13 +5431,13 @@
             <a:pPr algn="ctr">
               <a:defRPr/>
             </a:pPr>
-            <a:endParaRPr sz="2800"/>
+            <a:endParaRPr sz="4800"/>
           </a:p>
         </p:txBody>
       </p:sp>
       <p:sp>
         <p:nvSpPr>
-          <p:cNvPr id="365577883" name="Text 2"/>
+          <p:cNvPr id="1231298895" name="Text 2"/>
           <p:cNvSpPr/>
           <p:nvPr/>
         </p:nvSpPr>
@@ -5283,7 +5454,7 @@
         </p:spPr>
         <p:txBody>
           <a:bodyPr vertOverflow="overflow" horzOverflow="overflow" vert="horz" wrap="square" lIns="0" tIns="0" rIns="0" bIns="0" numCol="1" spcCol="0" rtlCol="0" fromWordArt="0" anchor="t" anchorCtr="0" forceAA="0" upright="0" compatLnSpc="0">
-            <a:normAutofit fontScale="95000" lnSpcReduction="1000"/>
+            <a:normAutofit fontScale="70000" lnSpcReduction="6000"/>
           </a:bodyPr>
           <a:lstStyle/>
           <a:p>
@@ -5295,7 +5466,7 @@
               <a:defRPr/>
             </a:pPr>
             <a:r>
-              <a:rPr lang="en-US" sz="2600" b="1">
+              <a:rPr lang="en-US" sz="3600" b="1">
                 <a:solidFill>
                   <a:srgbClr val="1D4ED8"/>
                 </a:solidFill>
@@ -5305,20 +5476,20 @@
               </a:rPr>
               <a:t>Wrong threat model</a:t>
             </a:r>
-            <a:endParaRPr lang="en-US" sz="2600"/>
+            <a:endParaRPr lang="en-US" sz="3600"/>
           </a:p>
         </p:txBody>
       </p:sp>
       <p:sp>
         <p:nvSpPr>
-          <p:cNvPr id="574239859" name="Text 3"/>
+          <p:cNvPr id="1866338083" name="Text 3"/>
           <p:cNvSpPr/>
           <p:nvPr/>
         </p:nvSpPr>
         <p:spPr bwMode="auto">
-          <a:xfrm>
-            <a:off x="1035049" y="2539163"/>
-            <a:ext cx="3047873" cy="916781"/>
+          <a:xfrm flipH="0" flipV="0">
+            <a:off x="1035048" y="2539162"/>
+            <a:ext cx="3047872" cy="1836815"/>
           </a:xfrm>
           <a:prstGeom prst="rect">
             <a:avLst/>
@@ -5328,7 +5499,7 @@
         </p:spPr>
         <p:txBody>
           <a:bodyPr vertOverflow="overflow" horzOverflow="overflow" vert="horz" wrap="square" lIns="0" tIns="0" rIns="0" bIns="0" numCol="1" spcCol="0" rtlCol="0" fromWordArt="0" anchor="t" anchorCtr="0" forceAA="0" upright="0" compatLnSpc="0">
-            <a:normAutofit fontScale="90000" lnSpcReduction="2000"/>
+            <a:normAutofit/>
           </a:bodyPr>
           <a:lstStyle/>
           <a:p>
@@ -5339,8 +5510,18 @@
               <a:buNone/>
               <a:defRPr/>
             </a:pPr>
+            <a:endParaRPr lang="en-US" sz="2600"/>
+          </a:p>
+          <a:p>
+            <a:pPr marL="0" indent="0" algn="l">
+              <a:lnSpc>
+                <a:spcPts val="1755"/>
+              </a:lnSpc>
+              <a:buNone/>
+              <a:defRPr/>
+            </a:pPr>
             <a:r>
-              <a:rPr lang="en-US" sz="1600">
+              <a:rPr lang="en-US" sz="1800">
                 <a:solidFill>
                   <a:srgbClr val="111111"/>
                 </a:solidFill>
@@ -5350,20 +5531,27 @@
               </a:rPr>
               <a:t>Nuclear I&amp;C ranks availability and integrity above confidentiality. The urgent quantum risk is firmware roots of trust and long-retention data.</a:t>
             </a:r>
-            <a:endParaRPr lang="en-US" sz="2200"/>
+            <a:endParaRPr lang="en-US" sz="1800">
+              <a:solidFill>
+                <a:srgbClr val="111111"/>
+              </a:solidFill>
+              <a:latin typeface="Arial"/>
+              <a:ea typeface="Arial"/>
+              <a:cs typeface="Arial"/>
+            </a:endParaRPr>
           </a:p>
         </p:txBody>
       </p:sp>
       <p:sp>
         <p:nvSpPr>
-          <p:cNvPr id="361729049" name="Shape 4"/>
+          <p:cNvPr id="1708880431" name="Shape 4"/>
           <p:cNvSpPr/>
           <p:nvPr/>
         </p:nvSpPr>
         <p:spPr bwMode="auto">
-          <a:xfrm>
-            <a:off x="4403724" y="2006457"/>
-            <a:ext cx="3384550" cy="1636812"/>
+          <a:xfrm flipH="0" flipV="0">
+            <a:off x="4403723" y="2006456"/>
+            <a:ext cx="3384549" cy="2466151"/>
           </a:xfrm>
           <a:prstGeom prst="roundRect">
             <a:avLst>
@@ -5386,13 +5574,13 @@
             <a:pPr algn="ctr">
               <a:defRPr/>
             </a:pPr>
-            <a:endParaRPr sz="2800"/>
+            <a:endParaRPr sz="4800"/>
           </a:p>
         </p:txBody>
       </p:sp>
       <p:sp>
         <p:nvSpPr>
-          <p:cNvPr id="609146257" name="Text 5"/>
+          <p:cNvPr id="1221573309" name="Text 5"/>
           <p:cNvSpPr/>
           <p:nvPr/>
         </p:nvSpPr>
@@ -5409,7 +5597,7 @@
         </p:spPr>
         <p:txBody>
           <a:bodyPr vertOverflow="overflow" horzOverflow="overflow" vert="horz" wrap="square" lIns="0" tIns="0" rIns="0" bIns="0" numCol="1" spcCol="0" rtlCol="0" fromWordArt="0" anchor="t" anchorCtr="0" forceAA="0" upright="0" compatLnSpc="0">
-            <a:normAutofit fontScale="90000" lnSpcReduction="2000"/>
+            <a:normAutofit fontScale="80000" lnSpcReduction="4000"/>
           </a:bodyPr>
           <a:lstStyle/>
           <a:p>
@@ -5421,7 +5609,7 @@
               <a:defRPr/>
             </a:pPr>
             <a:r>
-              <a:rPr lang="en-US" sz="2000" b="1">
+              <a:rPr lang="en-US" sz="2200" b="1">
                 <a:solidFill>
                   <a:srgbClr val="1D4ED8"/>
                 </a:solidFill>
@@ -5431,20 +5619,20 @@
               </a:rPr>
               <a:t>Attacks crypto cannot stop</a:t>
             </a:r>
-            <a:endParaRPr lang="en-US" sz="2600"/>
+            <a:endParaRPr lang="en-US" sz="3600"/>
           </a:p>
         </p:txBody>
       </p:sp>
       <p:sp>
         <p:nvSpPr>
-          <p:cNvPr id="648122459" name="Text 6"/>
+          <p:cNvPr id="2051299125" name="Text 6"/>
           <p:cNvSpPr/>
           <p:nvPr/>
         </p:nvSpPr>
         <p:spPr bwMode="auto">
-          <a:xfrm>
-            <a:off x="4616449" y="2539163"/>
-            <a:ext cx="3047873" cy="693936"/>
+          <a:xfrm flipH="0" flipV="0">
+            <a:off x="4616448" y="2539162"/>
+            <a:ext cx="3047872" cy="1753989"/>
           </a:xfrm>
           <a:prstGeom prst="rect">
             <a:avLst/>
@@ -5454,7 +5642,7 @@
         </p:spPr>
         <p:txBody>
           <a:bodyPr vertOverflow="overflow" horzOverflow="overflow" vert="horz" wrap="square" lIns="0" tIns="0" rIns="0" bIns="0" numCol="1" spcCol="0" rtlCol="0" fromWordArt="0" anchor="t" anchorCtr="0" forceAA="0" upright="0" compatLnSpc="0">
-            <a:normAutofit fontScale="95000" lnSpcReduction="1000"/>
+            <a:normAutofit/>
           </a:bodyPr>
           <a:lstStyle/>
           <a:p>
@@ -5465,8 +5653,18 @@
               <a:buNone/>
               <a:defRPr/>
             </a:pPr>
+            <a:endParaRPr sz="1800"/>
+          </a:p>
+          <a:p>
+            <a:pPr marL="0" indent="0" algn="l">
+              <a:lnSpc>
+                <a:spcPts val="1755"/>
+              </a:lnSpc>
+              <a:buNone/>
+              <a:defRPr/>
+            </a:pPr>
             <a:r>
-              <a:rPr lang="en-US" sz="1400">
+              <a:rPr lang="en-US" sz="1800">
                 <a:solidFill>
                   <a:srgbClr val="111111"/>
                 </a:solidFill>
@@ -5476,20 +5674,27 @@
               </a:rPr>
               <a:t>Process-level attacks and Stuxnet-type malware bypass link encryption, so they cannot judge a cryptographic choice.</a:t>
             </a:r>
-            <a:endParaRPr lang="en-US" sz="2200"/>
+            <a:endParaRPr lang="en-US" sz="1800">
+              <a:solidFill>
+                <a:srgbClr val="111111"/>
+              </a:solidFill>
+              <a:latin typeface="Arial"/>
+              <a:ea typeface="Arial"/>
+              <a:cs typeface="Arial"/>
+            </a:endParaRPr>
           </a:p>
         </p:txBody>
       </p:sp>
       <p:sp>
         <p:nvSpPr>
-          <p:cNvPr id="298571255" name="Shape 7"/>
+          <p:cNvPr id="1095130029" name="Shape 7"/>
           <p:cNvSpPr/>
           <p:nvPr/>
         </p:nvSpPr>
         <p:spPr bwMode="auto">
-          <a:xfrm>
-            <a:off x="7985124" y="2006457"/>
-            <a:ext cx="3384550" cy="1636812"/>
+          <a:xfrm flipH="0" flipV="0">
+            <a:off x="7985123" y="2006456"/>
+            <a:ext cx="3384549" cy="2466151"/>
           </a:xfrm>
           <a:prstGeom prst="roundRect">
             <a:avLst>
@@ -5512,13 +5717,13 @@
             <a:pPr algn="ctr">
               <a:defRPr/>
             </a:pPr>
-            <a:endParaRPr sz="2800"/>
+            <a:endParaRPr sz="4800"/>
           </a:p>
         </p:txBody>
       </p:sp>
       <p:sp>
         <p:nvSpPr>
-          <p:cNvPr id="75052782" name="Text 8"/>
+          <p:cNvPr id="1231877919" name="Text 8"/>
           <p:cNvSpPr/>
           <p:nvPr/>
         </p:nvSpPr>
@@ -5534,8 +5739,8 @@
           <a:ln/>
         </p:spPr>
         <p:txBody>
-          <a:bodyPr wrap="square" lIns="0" tIns="0" rIns="0" bIns="0" rtlCol="0" anchor="t">
-            <a:normAutofit/>
+          <a:bodyPr vertOverflow="overflow" horzOverflow="overflow" vert="horz" wrap="square" lIns="0" tIns="0" rIns="0" bIns="0" numCol="1" spcCol="0" rtlCol="0" fromWordArt="0" anchor="t" anchorCtr="0" forceAA="0" upright="0" compatLnSpc="0">
+            <a:normAutofit fontScale="75000" lnSpcReduction="5000"/>
           </a:bodyPr>
           <a:lstStyle/>
           <a:p>
@@ -5547,7 +5752,7 @@
               <a:defRPr/>
             </a:pPr>
             <a:r>
-              <a:rPr lang="en-US" sz="2600" b="1">
+              <a:rPr lang="en-US" sz="3600" b="1">
                 <a:solidFill>
                   <a:srgbClr val="1D4ED8"/>
                 </a:solidFill>
@@ -5557,20 +5762,20 @@
               </a:rPr>
               <a:t>Weak comparison</a:t>
             </a:r>
-            <a:endParaRPr lang="en-US" sz="2600"/>
+            <a:endParaRPr lang="en-US" sz="3600"/>
           </a:p>
         </p:txBody>
       </p:sp>
       <p:sp>
         <p:nvSpPr>
-          <p:cNvPr id="2120169202" name="Text 9"/>
+          <p:cNvPr id="439453267" name="Text 9"/>
           <p:cNvSpPr/>
           <p:nvPr/>
         </p:nvSpPr>
         <p:spPr bwMode="auto">
-          <a:xfrm>
-            <a:off x="8197849" y="2539163"/>
-            <a:ext cx="3047873" cy="693936"/>
+          <a:xfrm flipH="0" flipV="0">
+            <a:off x="8197848" y="2539162"/>
+            <a:ext cx="3047872" cy="1753989"/>
           </a:xfrm>
           <a:prstGeom prst="rect">
             <a:avLst/>
@@ -5580,7 +5785,7 @@
         </p:spPr>
         <p:txBody>
           <a:bodyPr vertOverflow="overflow" horzOverflow="overflow" vert="horz" wrap="square" lIns="0" tIns="0" rIns="0" bIns="0" numCol="1" spcCol="0" rtlCol="0" fromWordArt="0" anchor="t" anchorCtr="0" forceAA="0" upright="0" compatLnSpc="0">
-            <a:normAutofit fontScale="80000" lnSpcReduction="4000"/>
+            <a:normAutofit/>
           </a:bodyPr>
           <a:lstStyle/>
           <a:p>
@@ -5591,8 +5796,18 @@
               <a:buNone/>
               <a:defRPr/>
             </a:pPr>
+            <a:endParaRPr lang="en-US" sz="2000"/>
+          </a:p>
+          <a:p>
+            <a:pPr marL="0" indent="0" algn="l">
+              <a:lnSpc>
+                <a:spcPts val="1755"/>
+              </a:lnSpc>
+              <a:buNone/>
+              <a:defRPr/>
+            </a:pPr>
             <a:r>
-              <a:rPr lang="en-US" sz="2200">
+              <a:rPr lang="en-US" sz="1800">
                 <a:solidFill>
                   <a:srgbClr val="111111"/>
                 </a:solidFill>
@@ -5602,7 +5817,14 @@
               </a:rPr>
               <a:t>RSA/AES baseline, QKD-only without authentication, and an index with arbitrary weights.</a:t>
             </a:r>
-            <a:endParaRPr lang="en-US" sz="2200"/>
+            <a:endParaRPr lang="en-US" sz="1800">
+              <a:solidFill>
+                <a:srgbClr val="111111"/>
+              </a:solidFill>
+              <a:latin typeface="Arial"/>
+              <a:ea typeface="Arial"/>
+              <a:cs typeface="Arial"/>
+            </a:endParaRPr>
           </a:p>
         </p:txBody>
       </p:sp>
@@ -5648,7 +5870,7 @@
       </p:grpSpPr>
       <p:sp>
         <p:nvSpPr>
-          <p:cNvPr id="241123204" name="Text 0"/>
+          <p:cNvPr id="932882829" name="Text 0"/>
           <p:cNvSpPr/>
           <p:nvPr>
             <p:ph type="title"/>
@@ -5695,7 +5917,7 @@
       </p:sp>
       <p:pic>
         <p:nvPicPr>
-          <p:cNvPr id="1983293735" name="Image 0" descr="High-level architecture: five zones with QKD key supply on the left, PQC and classical subsystem on the right, and zone key management below"/>
+          <p:cNvPr id="1685827931" name="Image 0" descr="High-level architecture: five zones with QKD key supply on the left, PQC and classical subsystem on the right, and zone key management below"/>
           <p:cNvPicPr>
             <a:picLocks noChangeAspect="1"/>
           </p:cNvPicPr>
@@ -5758,7 +5980,7 @@
       </p:grpSpPr>
       <p:sp>
         <p:nvSpPr>
-          <p:cNvPr id="813629541" name="Text 0"/>
+          <p:cNvPr id="711991439" name="Text 0"/>
           <p:cNvSpPr/>
           <p:nvPr>
             <p:ph type="title"/>
@@ -5805,7 +6027,7 @@
       </p:sp>
       <p:graphicFrame>
         <p:nvGraphicFramePr>
-          <p:cNvPr id="2054151136" name="Table 0"/>
+          <p:cNvPr id="1146598407" name="Table 0"/>
           <p:cNvGraphicFramePr>
             <a:graphicFrameLocks xmlns:a="http://schemas.openxmlformats.org/drawingml/2006/main" noGrp="1"/>
           </p:cNvGraphicFramePr>
@@ -7143,7 +7365,7 @@
       </p:grpSpPr>
       <p:sp>
         <p:nvSpPr>
-          <p:cNvPr id="163412424" name="Text 0"/>
+          <p:cNvPr id="1389889520" name="Text 0"/>
           <p:cNvSpPr/>
           <p:nvPr>
             <p:ph type="title"/>
@@ -7190,7 +7412,7 @@
       </p:sp>
       <p:sp>
         <p:nvSpPr>
-          <p:cNvPr id="1995955181" name="Shape 1"/>
+          <p:cNvPr id="981852245" name="Shape 1"/>
           <p:cNvSpPr/>
           <p:nvPr/>
         </p:nvSpPr>
@@ -7226,7 +7448,7 @@
       </p:sp>
       <p:sp>
         <p:nvSpPr>
-          <p:cNvPr id="675662921" name="Text 2"/>
+          <p:cNvPr id="778261431" name="Text 2"/>
           <p:cNvSpPr/>
           <p:nvPr/>
         </p:nvSpPr>
@@ -7271,7 +7493,7 @@
       </p:sp>
       <p:sp>
         <p:nvSpPr>
-          <p:cNvPr id="1510234562" name="Text 3"/>
+          <p:cNvPr id="639306061" name="Text 3"/>
           <p:cNvSpPr/>
           <p:nvPr/>
         </p:nvSpPr>
@@ -7316,7 +7538,7 @@
       </p:sp>
       <p:sp>
         <p:nvSpPr>
-          <p:cNvPr id="1596668625" name="Shape 4"/>
+          <p:cNvPr id="442110544" name="Shape 4"/>
           <p:cNvSpPr/>
           <p:nvPr/>
         </p:nvSpPr>
@@ -7352,7 +7574,7 @@
       </p:sp>
       <p:sp>
         <p:nvSpPr>
-          <p:cNvPr id="274299858" name="Text 5"/>
+          <p:cNvPr id="289474446" name="Text 5"/>
           <p:cNvSpPr/>
           <p:nvPr/>
         </p:nvSpPr>
@@ -7397,7 +7619,7 @@
       </p:sp>
       <p:sp>
         <p:nvSpPr>
-          <p:cNvPr id="386180363" name="Text 6"/>
+          <p:cNvPr id="766823782" name="Text 6"/>
           <p:cNvSpPr/>
           <p:nvPr/>
         </p:nvSpPr>
@@ -7442,7 +7664,7 @@
       </p:sp>
       <p:sp>
         <p:nvSpPr>
-          <p:cNvPr id="470845195" name="Shape 7"/>
+          <p:cNvPr id="228444312" name="Shape 7"/>
           <p:cNvSpPr/>
           <p:nvPr/>
         </p:nvSpPr>
@@ -7478,7 +7700,7 @@
       </p:sp>
       <p:sp>
         <p:nvSpPr>
-          <p:cNvPr id="670893672" name="Text 8"/>
+          <p:cNvPr id="1852978936" name="Text 8"/>
           <p:cNvSpPr/>
           <p:nvPr/>
         </p:nvSpPr>
@@ -7523,7 +7745,7 @@
       </p:sp>
       <p:sp>
         <p:nvSpPr>
-          <p:cNvPr id="1188304322" name="Text 9"/>
+          <p:cNvPr id="1267244954" name="Text 9"/>
           <p:cNvSpPr/>
           <p:nvPr/>
         </p:nvSpPr>
@@ -7568,7 +7790,7 @@
       </p:sp>
       <p:sp>
         <p:nvSpPr>
-          <p:cNvPr id="1059606331" name="Shape 10"/>
+          <p:cNvPr id="1111917278" name="Shape 10"/>
           <p:cNvSpPr/>
           <p:nvPr/>
         </p:nvSpPr>
@@ -7604,7 +7826,7 @@
       </p:sp>
       <p:sp>
         <p:nvSpPr>
-          <p:cNvPr id="1607902384" name="Text 11"/>
+          <p:cNvPr id="1799415334" name="Text 11"/>
           <p:cNvSpPr/>
           <p:nvPr/>
         </p:nvSpPr>
@@ -7649,7 +7871,7 @@
       </p:sp>
       <p:sp>
         <p:nvSpPr>
-          <p:cNvPr id="734167168" name="Text 12"/>
+          <p:cNvPr id="485532558" name="Text 12"/>
           <p:cNvSpPr/>
           <p:nvPr/>
         </p:nvSpPr>
@@ -7694,7 +7916,7 @@
       </p:sp>
       <p:sp>
         <p:nvSpPr>
-          <p:cNvPr id="128343461" name="Shape 13"/>
+          <p:cNvPr id="1640356971" name="Shape 13"/>
           <p:cNvSpPr/>
           <p:nvPr/>
         </p:nvSpPr>
@@ -7730,7 +7952,7 @@
       </p:sp>
       <p:sp>
         <p:nvSpPr>
-          <p:cNvPr id="1362094883" name="Text 14"/>
+          <p:cNvPr id="15592139" name="Text 14"/>
           <p:cNvSpPr/>
           <p:nvPr/>
         </p:nvSpPr>
@@ -7775,7 +7997,7 @@
       </p:sp>
       <p:sp>
         <p:nvSpPr>
-          <p:cNvPr id="716002145" name="Text 15"/>
+          <p:cNvPr id="1759768799" name="Text 15"/>
           <p:cNvSpPr/>
           <p:nvPr/>
         </p:nvSpPr>
@@ -7820,7 +8042,7 @@
       </p:sp>
       <p:sp>
         <p:nvSpPr>
-          <p:cNvPr id="1919739549" name="Shape 16"/>
+          <p:cNvPr id="183317458" name="Shape 16"/>
           <p:cNvSpPr/>
           <p:nvPr/>
         </p:nvSpPr>
@@ -7856,7 +8078,7 @@
       </p:sp>
       <p:sp>
         <p:nvSpPr>
-          <p:cNvPr id="337925391" name="Text 17"/>
+          <p:cNvPr id="1624286145" name="Text 17"/>
           <p:cNvSpPr/>
           <p:nvPr/>
         </p:nvSpPr>
@@ -7901,7 +8123,7 @@
       </p:sp>
       <p:sp>
         <p:nvSpPr>
-          <p:cNvPr id="2093104095" name="Text 18"/>
+          <p:cNvPr id="706018733" name="Text 18"/>
           <p:cNvSpPr/>
           <p:nvPr/>
         </p:nvSpPr>
@@ -7986,7 +8208,7 @@
       </p:grpSpPr>
       <p:sp>
         <p:nvSpPr>
-          <p:cNvPr id="1568235431" name="Text 0"/>
+          <p:cNvPr id="1096351384" name="Text 0"/>
           <p:cNvSpPr/>
           <p:nvPr>
             <p:ph type="title"/>
@@ -8033,7 +8255,7 @@
       </p:sp>
       <p:sp>
         <p:nvSpPr>
-          <p:cNvPr id="21230370" name="Shape 1"/>
+          <p:cNvPr id="1400384823" name="Shape 1"/>
           <p:cNvSpPr/>
           <p:nvPr/>
         </p:nvSpPr>
@@ -8069,7 +8291,7 @@
       </p:sp>
       <p:sp>
         <p:nvSpPr>
-          <p:cNvPr id="30924690" name="Text 2"/>
+          <p:cNvPr id="2141786713" name="Text 2"/>
           <p:cNvSpPr/>
           <p:nvPr/>
         </p:nvSpPr>
@@ -8114,7 +8336,7 @@
       </p:sp>
       <p:sp>
         <p:nvSpPr>
-          <p:cNvPr id="1826971838" name="Text 3"/>
+          <p:cNvPr id="2071398076" name="Text 3"/>
           <p:cNvSpPr/>
           <p:nvPr/>
         </p:nvSpPr>
@@ -8159,7 +8381,7 @@
       </p:sp>
       <p:sp>
         <p:nvSpPr>
-          <p:cNvPr id="578913088" name="Shape 4"/>
+          <p:cNvPr id="1432156786" name="Shape 4"/>
           <p:cNvSpPr/>
           <p:nvPr/>
         </p:nvSpPr>
@@ -8195,7 +8417,7 @@
       </p:sp>
       <p:sp>
         <p:nvSpPr>
-          <p:cNvPr id="1713997295" name="Text 5"/>
+          <p:cNvPr id="164112013" name="Text 5"/>
           <p:cNvSpPr/>
           <p:nvPr/>
         </p:nvSpPr>
@@ -8240,7 +8462,7 @@
       </p:sp>
       <p:sp>
         <p:nvSpPr>
-          <p:cNvPr id="1661965157" name="Text 6"/>
+          <p:cNvPr id="127823929" name="Text 6"/>
           <p:cNvSpPr/>
           <p:nvPr/>
         </p:nvSpPr>
@@ -8285,7 +8507,7 @@
       </p:sp>
       <p:sp>
         <p:nvSpPr>
-          <p:cNvPr id="1990556025" name="Shape 7"/>
+          <p:cNvPr id="1842350994" name="Shape 7"/>
           <p:cNvSpPr/>
           <p:nvPr/>
         </p:nvSpPr>
@@ -8321,7 +8543,7 @@
       </p:sp>
       <p:sp>
         <p:nvSpPr>
-          <p:cNvPr id="922359726" name="Text 8"/>
+          <p:cNvPr id="225987916" name="Text 8"/>
           <p:cNvSpPr/>
           <p:nvPr/>
         </p:nvSpPr>
@@ -8366,7 +8588,7 @@
       </p:sp>
       <p:sp>
         <p:nvSpPr>
-          <p:cNvPr id="997104034" name="Text 9"/>
+          <p:cNvPr id="1215826259" name="Text 9"/>
           <p:cNvSpPr/>
           <p:nvPr/>
         </p:nvSpPr>
@@ -8451,7 +8673,7 @@
       </p:grpSpPr>
       <p:sp>
         <p:nvSpPr>
-          <p:cNvPr id="1639521323" name="Text 0"/>
+          <p:cNvPr id="2045648851" name="Text 0"/>
           <p:cNvSpPr/>
           <p:nvPr>
             <p:ph type="title"/>
@@ -8498,7 +8720,7 @@
       </p:sp>
       <p:graphicFrame>
         <p:nvGraphicFramePr>
-          <p:cNvPr id="1063050989" name="Table 0"/>
+          <p:cNvPr id="1197788466" name="Table 0"/>
           <p:cNvGraphicFramePr>
             <a:graphicFrameLocks xmlns:a="http://schemas.openxmlformats.org/drawingml/2006/main" noGrp="1"/>
           </p:cNvGraphicFramePr>
@@ -9661,7 +9883,7 @@
       </p:grpSpPr>
       <p:sp>
         <p:nvSpPr>
-          <p:cNvPr id="2110112083" name="Text 0"/>
+          <p:cNvPr id="1693672054" name="Text 0"/>
           <p:cNvSpPr/>
           <p:nvPr>
             <p:ph type="title"/>
@@ -9708,7 +9930,7 @@
       </p:sp>
       <p:graphicFrame>
         <p:nvGraphicFramePr>
-          <p:cNvPr id="2141525017" name="Table 0"/>
+          <p:cNvPr id="953784983" name="Table 0"/>
           <p:cNvGraphicFramePr>
             <a:graphicFrameLocks xmlns:a="http://schemas.openxmlformats.org/drawingml/2006/main" noGrp="1"/>
           </p:cNvGraphicFramePr>
@@ -10871,7 +11093,7 @@
       </p:grpSpPr>
       <p:sp>
         <p:nvSpPr>
-          <p:cNvPr id="2020490673" name="Text 0"/>
+          <p:cNvPr id="551057083" name="Text 0"/>
           <p:cNvSpPr/>
           <p:nvPr>
             <p:ph type="title"/>
@@ -10918,7 +11140,7 @@
       </p:sp>
       <p:graphicFrame>
         <p:nvGraphicFramePr>
-          <p:cNvPr id="898245490" name="Table 0"/>
+          <p:cNvPr id="1604011725" name="Table 0"/>
           <p:cNvGraphicFramePr>
             <a:graphicFrameLocks xmlns:a="http://schemas.openxmlformats.org/drawingml/2006/main" noGrp="1"/>
           </p:cNvGraphicFramePr>
@@ -12107,4 +12329,394 @@
   </a:themeElements>
   <a:objectDefaults/>
 </a:theme>
+</file>
+
+<file path=ppt/theme/theme2.xml><?xml version="1.0" encoding="utf-8"?>
+<a:theme xmlns:a="http://schemas.openxmlformats.org/drawingml/2006/main" xmlns:r="http://schemas.openxmlformats.org/officeDocument/2006/relationships" xmlns:p="http://schemas.openxmlformats.org/presentationml/2006/main" name="Zone-Wise PQC and QKD for SMR Control Systems">
+  <a:themeElements>
+    <a:clrScheme name="Zone-Wise PQC and QKD for SMR Control Systems">
+      <a:dk1>
+        <a:srgbClr val="1E3A8A"/>
+      </a:dk1>
+      <a:lt1>
+        <a:srgbClr val="FFFFFF"/>
+      </a:lt1>
+      <a:dk2>
+        <a:srgbClr val="566BA7"/>
+      </a:dk2>
+      <a:lt2>
+        <a:srgbClr val="E9EBF3"/>
+      </a:lt2>
+      <a:accent1>
+        <a:srgbClr val="1D4ED8"/>
+      </a:accent1>
+      <a:accent2>
+        <a:srgbClr val="9AA0A6"/>
+      </a:accent2>
+      <a:accent3>
+        <a:srgbClr val="7889B9"/>
+      </a:accent3>
+      <a:accent4>
+        <a:srgbClr val="9AA6CA"/>
+      </a:accent4>
+      <a:accent5>
+        <a:srgbClr val="BCC4DC"/>
+      </a:accent5>
+      <a:accent6>
+        <a:srgbClr val="D2D8E8"/>
+      </a:accent6>
+      <a:hlink>
+        <a:srgbClr val="0563C1"/>
+      </a:hlink>
+      <a:folHlink>
+        <a:srgbClr val="954F72"/>
+      </a:folHlink>
+    </a:clrScheme>
+    <a:fontScheme name="Zone-Wise PQC and QKD for SMR Control Systems">
+      <a:majorFont>
+        <a:latin typeface="Arial"/>
+        <a:ea typeface="Arial"/>
+        <a:cs typeface="Arial"/>
+      </a:majorFont>
+      <a:minorFont>
+        <a:latin typeface="Arial"/>
+        <a:ea typeface="Arial"/>
+        <a:cs typeface="Arial"/>
+      </a:minorFont>
+    </a:fontScheme>
+    <a:fmtScheme name="Office">
+      <a:fillStyleLst>
+        <a:solidFill>
+          <a:schemeClr val="phClr"/>
+        </a:solidFill>
+        <a:gradFill>
+          <a:gsLst>
+            <a:gs pos="0">
+              <a:schemeClr val="phClr">
+                <a:lumMod val="110000"/>
+                <a:satMod val="105000"/>
+                <a:tint val="67000"/>
+              </a:schemeClr>
+            </a:gs>
+            <a:gs pos="50000">
+              <a:schemeClr val="phClr">
+                <a:lumMod val="105000"/>
+                <a:satMod val="103000"/>
+                <a:tint val="73000"/>
+              </a:schemeClr>
+            </a:gs>
+            <a:gs pos="100000">
+              <a:schemeClr val="phClr">
+                <a:lumMod val="105000"/>
+                <a:satMod val="109000"/>
+                <a:tint val="81000"/>
+              </a:schemeClr>
+            </a:gs>
+          </a:gsLst>
+          <a:lin ang="5400000" scaled="0"/>
+        </a:gradFill>
+        <a:gradFill>
+          <a:gsLst>
+            <a:gs pos="0">
+              <a:schemeClr val="phClr">
+                <a:satMod val="103000"/>
+                <a:lumMod val="102000"/>
+                <a:tint val="94000"/>
+              </a:schemeClr>
+            </a:gs>
+            <a:gs pos="50000">
+              <a:schemeClr val="phClr">
+                <a:satMod val="110000"/>
+                <a:lumMod val="100000"/>
+                <a:shade val="100000"/>
+              </a:schemeClr>
+            </a:gs>
+            <a:gs pos="100000">
+              <a:schemeClr val="phClr">
+                <a:lumMod val="99000"/>
+                <a:satMod val="120000"/>
+                <a:shade val="78000"/>
+              </a:schemeClr>
+            </a:gs>
+          </a:gsLst>
+          <a:lin ang="5400000" scaled="0"/>
+        </a:gradFill>
+      </a:fillStyleLst>
+      <a:lnStyleLst>
+        <a:ln w="6350" cap="flat" cmpd="sng" algn="ctr">
+          <a:solidFill>
+            <a:schemeClr val="phClr"/>
+          </a:solidFill>
+          <a:prstDash val="solid"/>
+          <a:miter lim="800000"/>
+        </a:ln>
+        <a:ln w="12700" cap="flat" cmpd="sng" algn="ctr">
+          <a:solidFill>
+            <a:schemeClr val="phClr"/>
+          </a:solidFill>
+          <a:prstDash val="solid"/>
+          <a:miter lim="800000"/>
+        </a:ln>
+        <a:ln w="19050" cap="flat" cmpd="sng" algn="ctr">
+          <a:solidFill>
+            <a:schemeClr val="phClr"/>
+          </a:solidFill>
+          <a:prstDash val="solid"/>
+          <a:miter lim="800000"/>
+        </a:ln>
+      </a:lnStyleLst>
+      <a:effectStyleLst>
+        <a:effectStyle>
+          <a:effectLst/>
+        </a:effectStyle>
+        <a:effectStyle>
+          <a:effectLst/>
+        </a:effectStyle>
+        <a:effectStyle>
+          <a:effectLst>
+            <a:outerShdw blurRad="57150" dist="19050" dir="5400000" algn="ctr" rotWithShape="0">
+              <a:srgbClr val="000000">
+                <a:alpha val="63000"/>
+              </a:srgbClr>
+            </a:outerShdw>
+          </a:effectLst>
+        </a:effectStyle>
+      </a:effectStyleLst>
+      <a:bgFillStyleLst>
+        <a:solidFill>
+          <a:schemeClr val="phClr"/>
+        </a:solidFill>
+        <a:solidFill>
+          <a:schemeClr val="phClr">
+            <a:tint val="95000"/>
+            <a:satMod val="170000"/>
+          </a:schemeClr>
+        </a:solidFill>
+        <a:gradFill>
+          <a:gsLst>
+            <a:gs pos="0">
+              <a:schemeClr val="phClr">
+                <a:tint val="93000"/>
+                <a:satMod val="150000"/>
+                <a:shade val="98000"/>
+                <a:lumMod val="102000"/>
+              </a:schemeClr>
+            </a:gs>
+            <a:gs pos="50000">
+              <a:schemeClr val="phClr">
+                <a:tint val="98000"/>
+                <a:satMod val="130000"/>
+                <a:shade val="90000"/>
+                <a:lumMod val="103000"/>
+              </a:schemeClr>
+            </a:gs>
+            <a:gs pos="100000">
+              <a:schemeClr val="phClr">
+                <a:shade val="63000"/>
+                <a:satMod val="120000"/>
+              </a:schemeClr>
+            </a:gs>
+          </a:gsLst>
+          <a:lin ang="5400000" scaled="0"/>
+        </a:gradFill>
+      </a:bgFillStyleLst>
+    </a:fmtScheme>
+  </a:themeElements>
+  <a:objectDefaults/>
+</a:theme>
+</file>
+
+<file path=ppt/theme/theme3.xml><?xml version="1.0" encoding="utf-8"?>
+<a:theme xmlns:a="http://schemas.openxmlformats.org/drawingml/2006/main" xmlns:r="http://schemas.openxmlformats.org/officeDocument/2006/relationships" xmlns:p="http://schemas.openxmlformats.org/presentationml/2006/main" name="Zone-Wise PQC and QKD for SMR Control Systems">
+  <a:themeElements>
+    <a:clrScheme name="Zone-Wise PQC and QKD for SMR Control Systems">
+      <a:dk1>
+        <a:srgbClr val="1E3A8A"/>
+      </a:dk1>
+      <a:lt1>
+        <a:srgbClr val="FFFFFF"/>
+      </a:lt1>
+      <a:dk2>
+        <a:srgbClr val="566BA7"/>
+      </a:dk2>
+      <a:lt2>
+        <a:srgbClr val="E9EBF3"/>
+      </a:lt2>
+      <a:accent1>
+        <a:srgbClr val="1D4ED8"/>
+      </a:accent1>
+      <a:accent2>
+        <a:srgbClr val="9AA0A6"/>
+      </a:accent2>
+      <a:accent3>
+        <a:srgbClr val="7889B9"/>
+      </a:accent3>
+      <a:accent4>
+        <a:srgbClr val="9AA6CA"/>
+      </a:accent4>
+      <a:accent5>
+        <a:srgbClr val="BCC4DC"/>
+      </a:accent5>
+      <a:accent6>
+        <a:srgbClr val="D2D8E8"/>
+      </a:accent6>
+      <a:hlink>
+        <a:srgbClr val="0563C1"/>
+      </a:hlink>
+      <a:folHlink>
+        <a:srgbClr val="954F72"/>
+      </a:folHlink>
+    </a:clrScheme>
+    <a:fontScheme name="Zone-Wise PQC and QKD for SMR Control Systems">
+      <a:majorFont>
+        <a:latin typeface="Arial"/>
+        <a:ea typeface="Arial"/>
+        <a:cs typeface="Arial"/>
+      </a:majorFont>
+      <a:minorFont>
+        <a:latin typeface="Arial"/>
+        <a:ea typeface="Arial"/>
+        <a:cs typeface="Arial"/>
+      </a:minorFont>
+    </a:fontScheme>
+    <a:fmtScheme name="Office">
+      <a:fillStyleLst>
+        <a:solidFill>
+          <a:schemeClr val="phClr"/>
+        </a:solidFill>
+        <a:gradFill>
+          <a:gsLst>
+            <a:gs pos="0">
+              <a:schemeClr val="phClr">
+                <a:lumMod val="110000"/>
+                <a:satMod val="105000"/>
+                <a:tint val="67000"/>
+              </a:schemeClr>
+            </a:gs>
+            <a:gs pos="50000">
+              <a:schemeClr val="phClr">
+                <a:lumMod val="105000"/>
+                <a:satMod val="103000"/>
+                <a:tint val="73000"/>
+              </a:schemeClr>
+            </a:gs>
+            <a:gs pos="100000">
+              <a:schemeClr val="phClr">
+                <a:lumMod val="105000"/>
+                <a:satMod val="109000"/>
+                <a:tint val="81000"/>
+              </a:schemeClr>
+            </a:gs>
+          </a:gsLst>
+          <a:lin ang="5400000" scaled="0"/>
+        </a:gradFill>
+        <a:gradFill>
+          <a:gsLst>
+            <a:gs pos="0">
+              <a:schemeClr val="phClr">
+                <a:satMod val="103000"/>
+                <a:lumMod val="102000"/>
+                <a:tint val="94000"/>
+              </a:schemeClr>
+            </a:gs>
+            <a:gs pos="50000">
+              <a:schemeClr val="phClr">
+                <a:satMod val="110000"/>
+                <a:lumMod val="100000"/>
+                <a:shade val="100000"/>
+              </a:schemeClr>
+            </a:gs>
+            <a:gs pos="100000">
+              <a:schemeClr val="phClr">
+                <a:lumMod val="99000"/>
+                <a:satMod val="120000"/>
+                <a:shade val="78000"/>
+              </a:schemeClr>
+            </a:gs>
+          </a:gsLst>
+          <a:lin ang="5400000" scaled="0"/>
+        </a:gradFill>
+      </a:fillStyleLst>
+      <a:lnStyleLst>
+        <a:ln w="6350" cap="flat" cmpd="sng" algn="ctr">
+          <a:solidFill>
+            <a:schemeClr val="phClr"/>
+          </a:solidFill>
+          <a:prstDash val="solid"/>
+          <a:miter lim="800000"/>
+        </a:ln>
+        <a:ln w="12700" cap="flat" cmpd="sng" algn="ctr">
+          <a:solidFill>
+            <a:schemeClr val="phClr"/>
+          </a:solidFill>
+          <a:prstDash val="solid"/>
+          <a:miter lim="800000"/>
+        </a:ln>
+        <a:ln w="19050" cap="flat" cmpd="sng" algn="ctr">
+          <a:solidFill>
+            <a:schemeClr val="phClr"/>
+          </a:solidFill>
+          <a:prstDash val="solid"/>
+          <a:miter lim="800000"/>
+        </a:ln>
+      </a:lnStyleLst>
+      <a:effectStyleLst>
+        <a:effectStyle>
+          <a:effectLst/>
+        </a:effectStyle>
+        <a:effectStyle>
+          <a:effectLst/>
+        </a:effectStyle>
+        <a:effectStyle>
+          <a:effectLst>
+            <a:outerShdw blurRad="57150" dist="19050" dir="5400000" algn="ctr" rotWithShape="0">
+              <a:srgbClr val="000000">
+                <a:alpha val="63000"/>
+              </a:srgbClr>
+            </a:outerShdw>
+          </a:effectLst>
+        </a:effectStyle>
+      </a:effectStyleLst>
+      <a:bgFillStyleLst>
+        <a:solidFill>
+          <a:schemeClr val="phClr"/>
+        </a:solidFill>
+        <a:solidFill>
+          <a:schemeClr val="phClr">
+            <a:tint val="95000"/>
+            <a:satMod val="170000"/>
+          </a:schemeClr>
+        </a:solidFill>
+        <a:gradFill>
+          <a:gsLst>
+            <a:gs pos="0">
+              <a:schemeClr val="phClr">
+                <a:tint val="93000"/>
+                <a:satMod val="150000"/>
+                <a:shade val="98000"/>
+                <a:lumMod val="102000"/>
+              </a:schemeClr>
+            </a:gs>
+            <a:gs pos="50000">
+              <a:schemeClr val="phClr">
+                <a:tint val="98000"/>
+                <a:satMod val="130000"/>
+                <a:shade val="90000"/>
+                <a:lumMod val="103000"/>
+              </a:schemeClr>
+            </a:gs>
+            <a:gs pos="100000">
+              <a:schemeClr val="phClr">
+                <a:shade val="63000"/>
+                <a:satMod val="120000"/>
+              </a:schemeClr>
+            </a:gs>
+          </a:gsLst>
+          <a:lin ang="5400000" scaled="0"/>
+        </a:gradFill>
+      </a:bgFillStyleLst>
+    </a:fmtScheme>
+  </a:themeElements>
+  <a:objectDefaults/>
+</a:theme>
 </file>